--- a/Lab03/AVC_2026_lab3.pptx
+++ b/Lab03/AVC_2026_lab3.pptx
@@ -16,12 +16,12 @@
     <p:sldId id="363" r:id="rId7"/>
     <p:sldId id="372" r:id="rId8"/>
     <p:sldId id="364" r:id="rId9"/>
-    <p:sldId id="365" r:id="rId10"/>
-    <p:sldId id="366" r:id="rId11"/>
-    <p:sldId id="367" r:id="rId12"/>
-    <p:sldId id="368" r:id="rId13"/>
-    <p:sldId id="369" r:id="rId14"/>
-    <p:sldId id="361" r:id="rId15"/>
+    <p:sldId id="367" r:id="rId10"/>
+    <p:sldId id="368" r:id="rId11"/>
+    <p:sldId id="369" r:id="rId12"/>
+    <p:sldId id="361" r:id="rId13"/>
+    <p:sldId id="374" r:id="rId14"/>
+    <p:sldId id="373" r:id="rId15"/>
   </p:sldIdLst>
   <p:sldSz cx="13439775" cy="7559675"/>
   <p:notesSz cx="7104063" cy="10234613"/>
@@ -1140,7 +1140,7 @@
           <a:p>
             <a:fld id="{80DF9979-574D-4FCB-BD6E-599E7841CFDD}" type="datetime1">
               <a:rPr lang="it-IT" smtClean="0"/>
-              <a:t>27/03/2026</a:t>
+              <a:t>01/04/2026</a:t>
             </a:fld>
             <a:endParaRPr lang="it-IT" dirty="0"/>
           </a:p>
@@ -1337,7 +1337,7 @@
             <a:pPr lvl="0"/>
             <a:fld id="{33A092CB-4E8C-444E-AC2D-3EB23560EDE6}" type="datetime1">
               <a:rPr lang="it-IT" smtClean="0"/>
-              <a:t>27/03/2026</a:t>
+              <a:t>01/04/2026</a:t>
             </a:fld>
             <a:endParaRPr lang="it-IT"/>
           </a:p>
@@ -1499,7 +1499,7 @@
             <a:pPr lvl="0"/>
             <a:fld id="{0D43846A-71D7-40C2-B978-3FE1541F8AA7}" type="datetime1">
               <a:rPr lang="it-IT" smtClean="0"/>
-              <a:t>27/03/2026</a:t>
+              <a:t>01/04/2026</a:t>
             </a:fld>
             <a:endParaRPr lang="it-IT"/>
           </a:p>
@@ -1692,7 +1692,7 @@
             </a:pPr>
             <a:fld id="{B8915EAB-5F24-4621-B5CB-23123A03CE81}" type="datetime1">
               <a:rPr lang="it-IT" smtClean="0"/>
-              <a:t>27/03/2026</a:t>
+              <a:t>01/04/2026</a:t>
             </a:fld>
             <a:endParaRPr lang="en-US"/>
           </a:p>
@@ -2309,7 +2309,7 @@
           <a:p>
             <a:fld id="{A41D7EFB-AC36-469E-832F-6A302A734BC9}" type="datetime1">
               <a:rPr lang="it-IT" smtClean="0"/>
-              <a:t>27/03/2026</a:t>
+              <a:t>01/04/2026</a:t>
             </a:fld>
             <a:endParaRPr lang="it-IT"/>
           </a:p>
@@ -2594,7 +2594,7 @@
           <a:p>
             <a:fld id="{26EF4E2F-09BC-4893-B59F-E09FEB593DFF}" type="datetime1">
               <a:rPr lang="it-IT" smtClean="0"/>
-              <a:t>27/03/2026</a:t>
+              <a:t>01/04/2026</a:t>
             </a:fld>
             <a:endParaRPr lang="it-IT"/>
           </a:p>
@@ -2925,7 +2925,7 @@
           <a:p>
             <a:fld id="{A4134BDA-DF45-40F9-B864-B60A86A21FB3}" type="datetime1">
               <a:rPr lang="it-IT" smtClean="0"/>
-              <a:t>27/03/2026</a:t>
+              <a:t>01/04/2026</a:t>
             </a:fld>
             <a:endParaRPr lang="it-IT"/>
           </a:p>
@@ -3391,7 +3391,7 @@
           <a:p>
             <a:fld id="{913F321D-3C3A-45AD-A9A8-1162D6FB1A67}" type="datetime1">
               <a:rPr lang="it-IT" smtClean="0"/>
-              <a:t>27/03/2026</a:t>
+              <a:t>01/04/2026</a:t>
             </a:fld>
             <a:endParaRPr lang="it-IT"/>
           </a:p>
@@ -3551,7 +3551,7 @@
           <a:p>
             <a:fld id="{D710AFC6-935C-4EDD-9E6E-FDBE53D01516}" type="datetime1">
               <a:rPr lang="it-IT" smtClean="0"/>
-              <a:t>27/03/2026</a:t>
+              <a:t>01/04/2026</a:t>
             </a:fld>
             <a:endParaRPr lang="it-IT"/>
           </a:p>
@@ -3683,7 +3683,7 @@
           <a:p>
             <a:fld id="{9EED9603-7416-49ED-8BDE-9C1A07C0F751}" type="datetime1">
               <a:rPr lang="it-IT" smtClean="0"/>
-              <a:t>27/03/2026</a:t>
+              <a:t>01/04/2026</a:t>
             </a:fld>
             <a:endParaRPr lang="it-IT"/>
           </a:p>
@@ -3964,7 +3964,7 @@
           <a:p>
             <a:fld id="{2678A060-68C4-490F-88AD-164C5D5E3657}" type="datetime1">
               <a:rPr lang="it-IT" smtClean="0"/>
-              <a:t>27/03/2026</a:t>
+              <a:t>01/04/2026</a:t>
             </a:fld>
             <a:endParaRPr lang="it-IT"/>
           </a:p>
@@ -4211,7 +4211,7 @@
             <a:pPr lvl="0"/>
             <a:fld id="{56547482-348D-459A-9C3D-CE48B5FD6840}" type="datetime1">
               <a:rPr lang="it-IT" smtClean="0"/>
-              <a:t>27/03/2026</a:t>
+              <a:t>01/04/2026</a:t>
             </a:fld>
             <a:endParaRPr lang="it-IT"/>
           </a:p>
@@ -4747,7 +4747,7 @@
           <a:p>
             <a:fld id="{BBFF5D7B-46A0-4BE9-9CCF-B972D8555FEA}" type="datetime1">
               <a:rPr lang="it-IT" smtClean="0"/>
-              <a:t>27/03/2026</a:t>
+              <a:t>01/04/2026</a:t>
             </a:fld>
             <a:endParaRPr lang="it-IT" dirty="0"/>
           </a:p>
@@ -5263,7 +5263,7 @@
             <a:pPr lvl="0"/>
             <a:fld id="{23830891-6604-4210-8522-088CA559AC82}" type="datetime1">
               <a:rPr lang="it-IT" smtClean="0"/>
-              <a:t>27/03/2026</a:t>
+              <a:t>01/04/2026</a:t>
             </a:fld>
             <a:endParaRPr lang="it-IT"/>
           </a:p>
@@ -5353,7 +5353,7 @@
           <p:cNvPr id="2" name="Titolo 1">
             <a:extLst>
               <a:ext uri="{FF2B5EF4-FFF2-40B4-BE49-F238E27FC236}">
-                <a16:creationId xmlns:a16="http://schemas.microsoft.com/office/drawing/2014/main" id="{28487AD3-7D20-B15E-4EC5-F5F82697D4C5}"/>
+                <a16:creationId xmlns:a16="http://schemas.microsoft.com/office/drawing/2014/main" id="{556E85D8-B9D8-DADE-C8B2-87BC8EB03BD9}"/>
               </a:ext>
             </a:extLst>
           </p:cNvPr>
@@ -5370,16 +5370,12 @@
           <a:lstStyle/>
           <a:p>
             <a:r>
-              <a:rPr lang="it-IT" dirty="0"/>
-              <a:t>FPFH (Fast Point Feature </a:t>
-            </a:r>
-            <a:r>
-              <a:rPr lang="it-IT" dirty="0" err="1"/>
-              <a:t>Histogram</a:t>
-            </a:r>
-            <a:r>
-              <a:rPr lang="it-IT" dirty="0"/>
-              <a:t>), </a:t>
+              <a:rPr lang="it-IT" dirty="0" err="1"/>
+              <a:t>Lessons</a:t>
+            </a:r>
+            <a:r>
+              <a:rPr lang="it-IT" dirty="0"/>
+              <a:t> plan</a:t>
             </a:r>
           </a:p>
         </p:txBody>
@@ -5389,7 +5385,7 @@
           <p:cNvPr id="3" name="Segnaposto contenuto 2">
             <a:extLst>
               <a:ext uri="{FF2B5EF4-FFF2-40B4-BE49-F238E27FC236}">
-                <a16:creationId xmlns:a16="http://schemas.microsoft.com/office/drawing/2014/main" id="{A1BF9716-897D-FDEA-4D86-9D9D0DF9C99F}"/>
+                <a16:creationId xmlns:a16="http://schemas.microsoft.com/office/drawing/2014/main" id="{59829DB5-AA60-597B-8330-E43E733D65FD}"/>
               </a:ext>
             </a:extLst>
           </p:cNvPr>
@@ -5407,7 +5403,200 @@
           <a:p>
             <a:r>
               <a:rPr lang="it-IT" dirty="0"/>
-              <a:t>From PCL https://pcl.readthedocs.io/</a:t>
+              <a:t>No </a:t>
+            </a:r>
+            <a:r>
+              <a:rPr lang="it-IT" dirty="0" err="1"/>
+              <a:t>lesson</a:t>
+            </a:r>
+            <a:r>
+              <a:rPr lang="it-IT" dirty="0"/>
+              <a:t> on </a:t>
+            </a:r>
+            <a:r>
+              <a:rPr lang="it-IT" dirty="0" err="1"/>
+              <a:t>Tuesday</a:t>
+            </a:r>
+            <a:r>
+              <a:rPr lang="it-IT" dirty="0"/>
+              <a:t>, April 7</a:t>
+            </a:r>
+          </a:p>
+          <a:p>
+            <a:pPr lvl="1"/>
+            <a:r>
+              <a:rPr lang="it-IT" dirty="0" err="1"/>
+              <a:t>You</a:t>
+            </a:r>
+            <a:r>
+              <a:rPr lang="it-IT" dirty="0"/>
+              <a:t> can exploit the </a:t>
+            </a:r>
+            <a:r>
+              <a:rPr lang="it-IT" dirty="0" err="1"/>
+              <a:t>available</a:t>
+            </a:r>
+            <a:r>
+              <a:rPr lang="it-IT" dirty="0"/>
+              <a:t> room for working </a:t>
+            </a:r>
+            <a:r>
+              <a:rPr lang="it-IT" dirty="0" err="1"/>
+              <a:t>at</a:t>
+            </a:r>
+            <a:r>
+              <a:rPr lang="it-IT" dirty="0"/>
+              <a:t> the </a:t>
+            </a:r>
+            <a:r>
+              <a:rPr lang="it-IT" dirty="0" err="1"/>
+              <a:t>homework</a:t>
+            </a:r>
+            <a:r>
+              <a:rPr lang="it-IT" dirty="0"/>
+              <a:t> (or </a:t>
+            </a:r>
+            <a:r>
+              <a:rPr lang="it-IT" dirty="0" err="1"/>
+              <a:t>starting</a:t>
+            </a:r>
+            <a:r>
+              <a:rPr lang="it-IT" dirty="0"/>
+              <a:t> to work </a:t>
+            </a:r>
+            <a:r>
+              <a:rPr lang="it-IT" dirty="0" err="1"/>
+              <a:t>at</a:t>
+            </a:r>
+            <a:r>
+              <a:rPr lang="it-IT" dirty="0"/>
+              <a:t> the last </a:t>
+            </a:r>
+            <a:r>
+              <a:rPr lang="it-IT" dirty="0" err="1"/>
+              <a:t>homework</a:t>
+            </a:r>
+            <a:r>
+              <a:rPr lang="it-IT" dirty="0"/>
+              <a:t>, </a:t>
+            </a:r>
+            <a:r>
+              <a:rPr lang="it-IT" dirty="0" err="1"/>
+              <a:t>see</a:t>
+            </a:r>
+            <a:r>
+              <a:rPr lang="it-IT" dirty="0"/>
+              <a:t> </a:t>
+            </a:r>
+            <a:r>
+              <a:rPr lang="it-IT" dirty="0" err="1"/>
+              <a:t>next</a:t>
+            </a:r>
+            <a:r>
+              <a:rPr lang="it-IT" dirty="0"/>
+              <a:t>)</a:t>
+            </a:r>
+          </a:p>
+          <a:p>
+            <a:pPr lvl="1"/>
+            <a:r>
+              <a:rPr lang="it-IT" dirty="0"/>
+              <a:t>The </a:t>
+            </a:r>
+            <a:r>
+              <a:rPr lang="it-IT" dirty="0" err="1"/>
+              <a:t>course</a:t>
+            </a:r>
+            <a:r>
+              <a:rPr lang="it-IT" dirty="0"/>
+              <a:t> </a:t>
+            </a:r>
+            <a:r>
+              <a:rPr lang="it-IT" dirty="0" err="1"/>
+              <a:t>should</a:t>
+            </a:r>
+            <a:r>
+              <a:rPr lang="it-IT" dirty="0"/>
+              <a:t> end on </a:t>
+            </a:r>
+            <a:r>
+              <a:rPr lang="it-IT" dirty="0" err="1"/>
+              <a:t>May</a:t>
+            </a:r>
+            <a:r>
+              <a:rPr lang="it-IT" dirty="0"/>
+              <a:t> 14</a:t>
+            </a:r>
+          </a:p>
+          <a:p>
+            <a:pPr lvl="2"/>
+            <a:r>
+              <a:rPr lang="it-IT" dirty="0"/>
+              <a:t>And some of the 3 hours </a:t>
+            </a:r>
+            <a:r>
+              <a:rPr lang="it-IT" dirty="0" err="1"/>
+              <a:t>lessons</a:t>
+            </a:r>
+            <a:r>
+              <a:rPr lang="it-IT" dirty="0"/>
+              <a:t> </a:t>
+            </a:r>
+            <a:r>
+              <a:rPr lang="it-IT" dirty="0" err="1"/>
+              <a:t>will</a:t>
+            </a:r>
+            <a:r>
+              <a:rPr lang="it-IT" dirty="0"/>
+              <a:t> be </a:t>
+            </a:r>
+            <a:r>
+              <a:rPr lang="it-IT" dirty="0" err="1"/>
+              <a:t>reduced</a:t>
+            </a:r>
+            <a:r>
+              <a:rPr lang="it-IT" dirty="0"/>
+              <a:t> to 2 hours (</a:t>
+            </a:r>
+            <a:r>
+              <a:rPr lang="it-IT" dirty="0" err="1"/>
+              <a:t>possibly</a:t>
+            </a:r>
+            <a:r>
+              <a:rPr lang="it-IT" dirty="0"/>
+              <a:t> April 21/28, </a:t>
+            </a:r>
+            <a:r>
+              <a:rPr lang="it-IT" dirty="0" err="1"/>
+              <a:t>not</a:t>
+            </a:r>
+            <a:r>
+              <a:rPr lang="it-IT" dirty="0"/>
+              <a:t> sure, </a:t>
+            </a:r>
+            <a:r>
+              <a:rPr lang="it-IT" dirty="0" err="1"/>
+              <a:t>you</a:t>
+            </a:r>
+            <a:r>
+              <a:rPr lang="it-IT" dirty="0"/>
+              <a:t> </a:t>
+            </a:r>
+            <a:r>
+              <a:rPr lang="it-IT" dirty="0" err="1"/>
+              <a:t>will</a:t>
+            </a:r>
+            <a:r>
+              <a:rPr lang="it-IT" dirty="0"/>
+              <a:t> be </a:t>
+            </a:r>
+            <a:r>
+              <a:rPr lang="it-IT" dirty="0" err="1"/>
+              <a:t>informed</a:t>
+            </a:r>
+            <a:r>
+              <a:rPr lang="it-IT" dirty="0"/>
+              <a:t>)</a:t>
             </a:r>
           </a:p>
         </p:txBody>
@@ -5417,7 +5606,7 @@
           <p:cNvPr id="4" name="Segnaposto data 3">
             <a:extLst>
               <a:ext uri="{FF2B5EF4-FFF2-40B4-BE49-F238E27FC236}">
-                <a16:creationId xmlns:a16="http://schemas.microsoft.com/office/drawing/2014/main" id="{F0DF5378-5B57-FA21-ABA9-AC7A5B2C6956}"/>
+                <a16:creationId xmlns:a16="http://schemas.microsoft.com/office/drawing/2014/main" id="{E2AA31BE-C78C-E753-8C58-5FF1777A5592}"/>
               </a:ext>
             </a:extLst>
           </p:cNvPr>
@@ -5435,7 +5624,7 @@
           <a:p>
             <a:fld id="{A41D7EFB-AC36-469E-832F-6A302A734BC9}" type="datetime1">
               <a:rPr lang="it-IT" smtClean="0"/>
-              <a:t>27/03/2026</a:t>
+              <a:t>01/04/2026</a:t>
             </a:fld>
             <a:endParaRPr lang="it-IT"/>
           </a:p>
@@ -5446,7 +5635,7 @@
           <p:cNvPr id="5" name="Segnaposto piè di pagina 4">
             <a:extLst>
               <a:ext uri="{FF2B5EF4-FFF2-40B4-BE49-F238E27FC236}">
-                <a16:creationId xmlns:a16="http://schemas.microsoft.com/office/drawing/2014/main" id="{80E76996-6748-AC0A-2455-B4A260230493}"/>
+                <a16:creationId xmlns:a16="http://schemas.microsoft.com/office/drawing/2014/main" id="{C292268F-4A2A-8CBE-57C9-9318045AA3C4}"/>
               </a:ext>
             </a:extLst>
           </p:cNvPr>
@@ -5474,7 +5663,7 @@
           <p:cNvPr id="6" name="Segnaposto numero diapositiva 5">
             <a:extLst>
               <a:ext uri="{FF2B5EF4-FFF2-40B4-BE49-F238E27FC236}">
-                <a16:creationId xmlns:a16="http://schemas.microsoft.com/office/drawing/2014/main" id="{84EF1E8E-92A9-4822-B9B5-6BBF38F3E1B2}"/>
+                <a16:creationId xmlns:a16="http://schemas.microsoft.com/office/drawing/2014/main" id="{E849FA7C-258C-652D-3FE9-97A3DA704804}"/>
               </a:ext>
             </a:extLst>
           </p:cNvPr>
@@ -5499,40 +5688,10 @@
           </a:p>
         </p:txBody>
       </p:sp>
-      <p:pic>
-        <p:nvPicPr>
-          <p:cNvPr id="8" name="Immagine 7">
-            <a:extLst>
-              <a:ext uri="{FF2B5EF4-FFF2-40B4-BE49-F238E27FC236}">
-                <a16:creationId xmlns:a16="http://schemas.microsoft.com/office/drawing/2014/main" id="{5A4FAA75-9CD0-8239-6DF8-5C52F8AFBA88}"/>
-              </a:ext>
-            </a:extLst>
-          </p:cNvPr>
-          <p:cNvPicPr>
-            <a:picLocks noChangeAspect="1"/>
-          </p:cNvPicPr>
-          <p:nvPr/>
-        </p:nvPicPr>
-        <p:blipFill>
-          <a:blip r:embed="rId2"/>
-          <a:stretch>
-            <a:fillRect/>
-          </a:stretch>
-        </p:blipFill>
-        <p:spPr>
-          <a:xfrm>
-            <a:off x="2831454" y="2339240"/>
-            <a:ext cx="10025293" cy="4895233"/>
-          </a:xfrm>
-          <a:prstGeom prst="rect">
-            <a:avLst/>
-          </a:prstGeom>
-        </p:spPr>
-      </p:pic>
     </p:spTree>
     <p:extLst>
       <p:ext uri="{BB962C8B-B14F-4D97-AF65-F5344CB8AC3E}">
-        <p14:creationId xmlns:p14="http://schemas.microsoft.com/office/powerpoint/2010/main" val="1991391201"/>
+        <p14:creationId xmlns:p14="http://schemas.microsoft.com/office/powerpoint/2010/main" val="466073800"/>
       </p:ext>
     </p:extLst>
   </p:cSld>
@@ -5564,7 +5723,7 @@
           <p:cNvPr id="2" name="Titolo 1">
             <a:extLst>
               <a:ext uri="{FF2B5EF4-FFF2-40B4-BE49-F238E27FC236}">
-                <a16:creationId xmlns:a16="http://schemas.microsoft.com/office/drawing/2014/main" id="{D0F99C38-6E20-C9B0-6FB4-3CB14A65B2DB}"/>
+                <a16:creationId xmlns:a16="http://schemas.microsoft.com/office/drawing/2014/main" id="{24809C61-4EC8-33AE-64EC-F933DBD2DECF}"/>
               </a:ext>
             </a:extLst>
           </p:cNvPr>
@@ -5575,21 +5734,19 @@
             <p:ph type="title"/>
           </p:nvPr>
         </p:nvSpPr>
-        <p:spPr>
-          <a:xfrm>
-            <a:off x="762180" y="122400"/>
-            <a:ext cx="12094568" cy="1262160"/>
-          </a:xfrm>
-        </p:spPr>
+        <p:spPr/>
         <p:txBody>
           <a:bodyPr/>
           <a:lstStyle/>
           <a:p>
             <a:r>
               <a:rPr lang="it-IT" dirty="0" err="1"/>
-              <a:t>Homework</a:t>
-            </a:r>
-            <a:endParaRPr lang="it-IT" dirty="0"/>
+              <a:t>Shape</a:t>
+            </a:r>
+            <a:r>
+              <a:rPr lang="it-IT" dirty="0"/>
+              <a:t> contest</a:t>
+            </a:r>
           </a:p>
         </p:txBody>
       </p:sp>
@@ -5598,7 +5755,7 @@
           <p:cNvPr id="3" name="Segnaposto contenuto 2">
             <a:extLst>
               <a:ext uri="{FF2B5EF4-FFF2-40B4-BE49-F238E27FC236}">
-                <a16:creationId xmlns:a16="http://schemas.microsoft.com/office/drawing/2014/main" id="{74496F0C-E304-13E3-012C-E8AC1AE3A0AD}"/>
+                <a16:creationId xmlns:a16="http://schemas.microsoft.com/office/drawing/2014/main" id="{1EA5D1A2-CF69-9DF8-BE1B-517B29FAC802}"/>
               </a:ext>
             </a:extLst>
           </p:cNvPr>
@@ -5609,27 +5766,30 @@
             <p:ph idx="1"/>
           </p:nvPr>
         </p:nvSpPr>
-        <p:spPr>
-          <a:xfrm>
-            <a:off x="582196" y="1681200"/>
-            <a:ext cx="12274555" cy="4989600"/>
-          </a:xfrm>
-        </p:spPr>
+        <p:spPr/>
         <p:txBody>
           <a:bodyPr/>
           <a:lstStyle/>
           <a:p>
             <a:r>
               <a:rPr lang="it-IT" dirty="0" err="1"/>
-              <a:t>Consider</a:t>
-            </a:r>
-            <a:r>
-              <a:rPr lang="it-IT" dirty="0"/>
-              <a:t> the point clouds of the </a:t>
-            </a:r>
-            <a:r>
-              <a:rPr lang="it-IT" dirty="0" err="1"/>
-              <a:t>partial</a:t>
+              <a:t>Before</a:t>
+            </a:r>
+            <a:r>
+              <a:rPr lang="it-IT" dirty="0"/>
+              <a:t> the end of the </a:t>
+            </a:r>
+            <a:r>
+              <a:rPr lang="it-IT" dirty="0" err="1"/>
+              <a:t>course</a:t>
+            </a:r>
+            <a:r>
+              <a:rPr lang="it-IT" dirty="0"/>
+              <a:t> (</a:t>
+            </a:r>
+            <a:r>
+              <a:rPr lang="it-IT" dirty="0" err="1"/>
+              <a:t>currently</a:t>
             </a:r>
             <a:r>
               <a:rPr lang="it-IT" dirty="0"/>
@@ -5637,12 +5797,232 @@
             </a:r>
             <a:r>
               <a:rPr lang="it-IT" dirty="0" err="1"/>
-              <a:t>scans</a:t>
+              <a:t>planned</a:t>
+            </a:r>
+            <a:r>
+              <a:rPr lang="it-IT" dirty="0"/>
+              <a:t> on </a:t>
+            </a:r>
+            <a:r>
+              <a:rPr lang="it-IT" dirty="0" err="1"/>
+              <a:t>May</a:t>
+            </a:r>
+            <a:r>
+              <a:rPr lang="it-IT" dirty="0"/>
+              <a:t> 12) </a:t>
+            </a:r>
+            <a:r>
+              <a:rPr lang="it-IT" dirty="0" err="1"/>
+              <a:t>students</a:t>
+            </a:r>
+            <a:r>
+              <a:rPr lang="it-IT" dirty="0"/>
+              <a:t> are </a:t>
+            </a:r>
+            <a:r>
+              <a:rPr lang="it-IT" dirty="0" err="1"/>
+              <a:t>invited</a:t>
+            </a:r>
+            <a:r>
+              <a:rPr lang="it-IT" dirty="0"/>
+              <a:t> to</a:t>
+            </a:r>
+          </a:p>
+          <a:p>
+            <a:pPr lvl="1"/>
+            <a:r>
+              <a:rPr lang="it-IT" dirty="0"/>
+              <a:t>Create a </a:t>
+            </a:r>
+            <a:r>
+              <a:rPr lang="it-IT" dirty="0" err="1"/>
+              <a:t>shape</a:t>
+            </a:r>
+            <a:r>
+              <a:rPr lang="it-IT" dirty="0"/>
+              <a:t> (</a:t>
+            </a:r>
+            <a:r>
+              <a:rPr lang="it-IT" dirty="0" err="1"/>
+              <a:t>triangle</a:t>
+            </a:r>
+            <a:r>
+              <a:rPr lang="it-IT" dirty="0"/>
+              <a:t> mesh) </a:t>
+            </a:r>
+            <a:r>
+              <a:rPr lang="it-IT" dirty="0" err="1"/>
+              <a:t>that</a:t>
             </a:r>
             <a:r>
               <a:rPr lang="it-IT" dirty="0"/>
               <a:t> </a:t>
             </a:r>
+            <a:r>
+              <a:rPr lang="it-IT" dirty="0" err="1"/>
+              <a:t>will</a:t>
+            </a:r>
+            <a:r>
+              <a:rPr lang="it-IT" dirty="0"/>
+              <a:t> be </a:t>
+            </a:r>
+            <a:r>
+              <a:rPr lang="it-IT" dirty="0" err="1"/>
+              <a:t>manufactured</a:t>
+            </a:r>
+            <a:r>
+              <a:rPr lang="it-IT" dirty="0"/>
+              <a:t> </a:t>
+            </a:r>
+            <a:r>
+              <a:rPr lang="it-IT" dirty="0" err="1"/>
+              <a:t>during</a:t>
+            </a:r>
+            <a:r>
+              <a:rPr lang="it-IT" dirty="0"/>
+              <a:t> the last </a:t>
+            </a:r>
+            <a:r>
+              <a:rPr lang="it-IT" dirty="0" err="1"/>
+              <a:t>lesson</a:t>
+            </a:r>
+            <a:r>
+              <a:rPr lang="it-IT" dirty="0"/>
+              <a:t> of the </a:t>
+            </a:r>
+            <a:r>
+              <a:rPr lang="it-IT" dirty="0" err="1"/>
+              <a:t>course</a:t>
+            </a:r>
+            <a:endParaRPr lang="it-IT" dirty="0"/>
+          </a:p>
+          <a:p>
+            <a:pPr lvl="2"/>
+            <a:r>
+              <a:rPr lang="it-IT" dirty="0"/>
+              <a:t>Using vision </a:t>
+            </a:r>
+            <a:r>
+              <a:rPr lang="it-IT" dirty="0" err="1"/>
+              <a:t>based</a:t>
+            </a:r>
+            <a:r>
+              <a:rPr lang="it-IT" dirty="0"/>
+              <a:t> pipeline and post processing (</a:t>
+            </a:r>
+            <a:r>
+              <a:rPr lang="it-IT" dirty="0" err="1"/>
+              <a:t>meshing</a:t>
+            </a:r>
+            <a:r>
+              <a:rPr lang="it-IT" dirty="0"/>
+              <a:t>, </a:t>
+            </a:r>
+            <a:r>
+              <a:rPr lang="it-IT" dirty="0" err="1"/>
+              <a:t>smoothing</a:t>
+            </a:r>
+            <a:r>
+              <a:rPr lang="it-IT" dirty="0"/>
+              <a:t> etc.)</a:t>
+            </a:r>
+          </a:p>
+          <a:p>
+            <a:pPr lvl="2"/>
+            <a:r>
+              <a:rPr lang="it-IT" dirty="0" err="1"/>
+              <a:t>Adding</a:t>
+            </a:r>
+            <a:r>
+              <a:rPr lang="it-IT" dirty="0"/>
+              <a:t> </a:t>
+            </a:r>
+            <a:r>
+              <a:rPr lang="it-IT" dirty="0" err="1"/>
+              <a:t>designed</a:t>
+            </a:r>
+            <a:r>
+              <a:rPr lang="it-IT" dirty="0"/>
+              <a:t> parts (Using Blender)</a:t>
+            </a:r>
+          </a:p>
+          <a:p>
+            <a:pPr lvl="2"/>
+            <a:r>
+              <a:rPr lang="it-IT" dirty="0" err="1"/>
+              <a:t>Preparing</a:t>
+            </a:r>
+            <a:r>
+              <a:rPr lang="it-IT" dirty="0"/>
+              <a:t> </a:t>
+            </a:r>
+            <a:r>
+              <a:rPr lang="it-IT" dirty="0" err="1"/>
+              <a:t>it</a:t>
+            </a:r>
+            <a:r>
+              <a:rPr lang="it-IT" dirty="0"/>
+              <a:t> for printing (</a:t>
+            </a:r>
+            <a:r>
+              <a:rPr lang="it-IT" dirty="0" err="1"/>
+              <a:t>we’ll</a:t>
+            </a:r>
+            <a:r>
+              <a:rPr lang="it-IT" dirty="0"/>
+              <a:t> </a:t>
+            </a:r>
+            <a:r>
+              <a:rPr lang="it-IT" dirty="0" err="1"/>
+              <a:t>see</a:t>
+            </a:r>
+            <a:r>
+              <a:rPr lang="it-IT" dirty="0"/>
+              <a:t>)</a:t>
+            </a:r>
+          </a:p>
+          <a:p>
+            <a:r>
+              <a:rPr lang="it-IT" dirty="0"/>
+              <a:t>The </a:t>
+            </a:r>
+            <a:r>
+              <a:rPr lang="it-IT" dirty="0" err="1"/>
+              <a:t>winning</a:t>
+            </a:r>
+            <a:r>
+              <a:rPr lang="it-IT" dirty="0"/>
+              <a:t> </a:t>
+            </a:r>
+            <a:r>
+              <a:rPr lang="it-IT" dirty="0" err="1"/>
+              <a:t>shape</a:t>
+            </a:r>
+            <a:r>
+              <a:rPr lang="it-IT" dirty="0"/>
+              <a:t> </a:t>
+            </a:r>
+            <a:r>
+              <a:rPr lang="it-IT" dirty="0" err="1"/>
+              <a:t>will</a:t>
+            </a:r>
+            <a:r>
+              <a:rPr lang="it-IT" dirty="0"/>
+              <a:t> be printed and </a:t>
+            </a:r>
+            <a:r>
+              <a:rPr lang="it-IT" dirty="0" err="1"/>
+              <a:t>given</a:t>
+            </a:r>
+            <a:r>
+              <a:rPr lang="it-IT" dirty="0"/>
+              <a:t> to the </a:t>
+            </a:r>
+            <a:r>
+              <a:rPr lang="it-IT" dirty="0" err="1"/>
+              <a:t>author</a:t>
+            </a:r>
+            <a:endParaRPr lang="it-IT" dirty="0"/>
           </a:p>
         </p:txBody>
       </p:sp>
@@ -5651,7 +6031,7 @@
           <p:cNvPr id="4" name="Segnaposto data 3">
             <a:extLst>
               <a:ext uri="{FF2B5EF4-FFF2-40B4-BE49-F238E27FC236}">
-                <a16:creationId xmlns:a16="http://schemas.microsoft.com/office/drawing/2014/main" id="{1D485F38-DEC1-38E4-37EB-BAA4F94AD01D}"/>
+                <a16:creationId xmlns:a16="http://schemas.microsoft.com/office/drawing/2014/main" id="{5833597D-C9D5-1F19-7C6D-0D8040B4AE0A}"/>
               </a:ext>
             </a:extLst>
           </p:cNvPr>
@@ -5662,19 +6042,14 @@
             <p:ph type="dt" sz="half" idx="10"/>
           </p:nvPr>
         </p:nvSpPr>
-        <p:spPr>
-          <a:xfrm>
-            <a:off x="671946" y="7058520"/>
-            <a:ext cx="3130793" cy="349920"/>
-          </a:xfrm>
-        </p:spPr>
+        <p:spPr/>
         <p:txBody>
           <a:bodyPr/>
           <a:lstStyle/>
           <a:p>
-            <a:fld id="{7E72A12E-10B4-4B10-B907-CFB580FFDFA1}" type="datetime1">
+            <a:fld id="{A41D7EFB-AC36-469E-832F-6A302A734BC9}" type="datetime1">
               <a:rPr lang="it-IT" smtClean="0"/>
-              <a:t>27/03/2026</a:t>
+              <a:t>01/04/2026</a:t>
             </a:fld>
             <a:endParaRPr lang="it-IT"/>
           </a:p>
@@ -5685,7 +6060,7 @@
           <p:cNvPr id="5" name="Segnaposto piè di pagina 4">
             <a:extLst>
               <a:ext uri="{FF2B5EF4-FFF2-40B4-BE49-F238E27FC236}">
-                <a16:creationId xmlns:a16="http://schemas.microsoft.com/office/drawing/2014/main" id="{A9EC0DC2-12FE-2BCE-E545-798AE5728618}"/>
+                <a16:creationId xmlns:a16="http://schemas.microsoft.com/office/drawing/2014/main" id="{A21242FA-5C90-8CAD-D22D-85FC6122F540}"/>
               </a:ext>
             </a:extLst>
           </p:cNvPr>
@@ -5696,12 +6071,7 @@
             <p:ph type="ftr" sz="quarter" idx="11"/>
           </p:nvPr>
         </p:nvSpPr>
-        <p:spPr>
-          <a:xfrm>
-            <a:off x="4596118" y="7041605"/>
-            <a:ext cx="4259665" cy="366839"/>
-          </a:xfrm>
-        </p:spPr>
+        <p:spPr/>
         <p:txBody>
           <a:bodyPr/>
           <a:lstStyle/>
@@ -5718,7 +6088,7 @@
           <p:cNvPr id="6" name="Segnaposto numero diapositiva 5">
             <a:extLst>
               <a:ext uri="{FF2B5EF4-FFF2-40B4-BE49-F238E27FC236}">
-                <a16:creationId xmlns:a16="http://schemas.microsoft.com/office/drawing/2014/main" id="{D08DB457-9407-4344-FE8E-53A014DDA74A}"/>
+                <a16:creationId xmlns:a16="http://schemas.microsoft.com/office/drawing/2014/main" id="{168F9765-06A7-CAA5-3B12-1F3FC17AAD39}"/>
               </a:ext>
             </a:extLst>
           </p:cNvPr>
@@ -5729,12 +6099,7 @@
             <p:ph type="sldNum" sz="quarter" idx="12"/>
           </p:nvPr>
         </p:nvSpPr>
-        <p:spPr>
-          <a:xfrm>
-            <a:off x="9635721" y="7058520"/>
-            <a:ext cx="3130793" cy="349920"/>
-          </a:xfrm>
-        </p:spPr>
+        <p:spPr/>
         <p:txBody>
           <a:bodyPr/>
           <a:lstStyle/>
@@ -5751,7 +6116,7 @@
     </p:spTree>
     <p:extLst>
       <p:ext uri="{BB962C8B-B14F-4D97-AF65-F5344CB8AC3E}">
-        <p14:creationId xmlns:p14="http://schemas.microsoft.com/office/powerpoint/2010/main" val="3719427420"/>
+        <p14:creationId xmlns:p14="http://schemas.microsoft.com/office/powerpoint/2010/main" val="152027947"/>
       </p:ext>
     </p:extLst>
   </p:cSld>
@@ -5848,6 +6213,42 @@
             </a:r>
           </a:p>
           <a:p>
+            <a:pPr lvl="1"/>
+            <a:r>
+              <a:rPr lang="en-US"/>
+              <a:t>Available in </a:t>
+            </a:r>
+            <a:r>
+              <a:rPr lang="en-US" dirty="0"/>
+              <a:t>p</a:t>
+            </a:r>
+            <a:r>
+              <a:rPr lang="en-US"/>
+              <a:t>ython</a:t>
+            </a:r>
+            <a:r>
+              <a:rPr lang="en-US" dirty="0"/>
+              <a:t>: </a:t>
+            </a:r>
+            <a:r>
+              <a:rPr lang="it-IT" dirty="0" err="1"/>
+              <a:t>pip</a:t>
+            </a:r>
+            <a:r>
+              <a:rPr lang="it-IT" dirty="0"/>
+              <a:t> </a:t>
+            </a:r>
+            <a:r>
+              <a:rPr lang="it-IT" dirty="0" err="1"/>
+              <a:t>install</a:t>
+            </a:r>
+            <a:r>
+              <a:rPr lang="it-IT" dirty="0"/>
+              <a:t> open3d</a:t>
+            </a:r>
+            <a:endParaRPr lang="en-US" dirty="0"/>
+          </a:p>
+          <a:p>
             <a:r>
               <a:rPr lang="en-US" dirty="0"/>
               <a:t>Let’s use in the python codes in the Lab3 archive </a:t>
@@ -5907,7 +6308,7 @@
           <a:p>
             <a:fld id="{7DAD677D-C9D7-4757-AC1C-9AA6E071CD66}" type="datetime1">
               <a:rPr lang="it-IT" smtClean="0"/>
-              <a:t>27/03/2026</a:t>
+              <a:t>01/04/2026</a:t>
             </a:fld>
             <a:endParaRPr lang="it-IT"/>
           </a:p>
@@ -6289,7 +6690,7 @@
           <a:p>
             <a:fld id="{AFFB1AF7-47A6-49E1-8A3D-38B396A128C8}" type="datetime1">
               <a:rPr lang="it-IT" smtClean="0"/>
-              <a:t>27/03/2026</a:t>
+              <a:t>01/04/2026</a:t>
             </a:fld>
             <a:endParaRPr lang="it-IT"/>
           </a:p>
@@ -6700,7 +7101,7 @@
           <a:p>
             <a:fld id="{A41D7EFB-AC36-469E-832F-6A302A734BC9}" type="datetime1">
               <a:rPr lang="it-IT" smtClean="0"/>
-              <a:t>27/03/2026</a:t>
+              <a:t>01/04/2026</a:t>
             </a:fld>
             <a:endParaRPr lang="it-IT"/>
           </a:p>
@@ -6794,6 +7195,36 @@
           <a:chExt cx="0" cy="0"/>
         </a:xfrm>
       </p:grpSpPr>
+      <p:pic>
+        <p:nvPicPr>
+          <p:cNvPr id="14" name="Immagine 13">
+            <a:extLst>
+              <a:ext uri="{FF2B5EF4-FFF2-40B4-BE49-F238E27FC236}">
+                <a16:creationId xmlns:a16="http://schemas.microsoft.com/office/drawing/2014/main" id="{6B6D41B2-351D-082B-7B9C-0193DBAA4F51}"/>
+              </a:ext>
+            </a:extLst>
+          </p:cNvPr>
+          <p:cNvPicPr>
+            <a:picLocks noChangeAspect="1"/>
+          </p:cNvPicPr>
+          <p:nvPr/>
+        </p:nvPicPr>
+        <p:blipFill>
+          <a:blip r:embed="rId2"/>
+          <a:stretch>
+            <a:fillRect/>
+          </a:stretch>
+        </p:blipFill>
+        <p:spPr>
+          <a:xfrm>
+            <a:off x="6475849" y="4330596"/>
+            <a:ext cx="5634673" cy="658854"/>
+          </a:xfrm>
+          <a:prstGeom prst="rect">
+            <a:avLst/>
+          </a:prstGeom>
+        </p:spPr>
+      </p:pic>
       <p:sp>
         <p:nvSpPr>
           <p:cNvPr id="2" name="Titolo 1">
@@ -6859,8 +7290,69 @@
             <a:pPr lvl="1"/>
             <a:r>
               <a:rPr lang="en-US" dirty="0"/>
-              <a:t>Procrustes solution</a:t>
-            </a:r>
+              <a:t>Orthogonal </a:t>
+            </a:r>
+            <a:r>
+              <a:rPr lang="en-US" dirty="0" err="1"/>
+              <a:t>procrustes</a:t>
+            </a:r>
+            <a:r>
+              <a:rPr lang="en-US" dirty="0"/>
+              <a:t> problem solution</a:t>
+            </a:r>
+          </a:p>
+          <a:p>
+            <a:pPr marL="108000" indent="0">
+              <a:buNone/>
+            </a:pPr>
+            <a:endParaRPr lang="en-US" dirty="0"/>
+          </a:p>
+          <a:p>
+            <a:pPr lvl="1"/>
+            <a:r>
+              <a:rPr lang="en-US" dirty="0"/>
+              <a:t>equivalent to finding the nearest orthogonal matrix to a given matrix  </a:t>
+            </a:r>
+          </a:p>
+          <a:p>
+            <a:pPr lvl="1"/>
+            <a:r>
+              <a:rPr lang="en-US" dirty="0"/>
+              <a:t>solving the </a:t>
+            </a:r>
+            <a:r>
+              <a:rPr lang="en-US" b="1" dirty="0"/>
+              <a:t>closest orthogonal approximation problem</a:t>
+            </a:r>
+          </a:p>
+          <a:p>
+            <a:pPr marL="540000" lvl="1" indent="0">
+              <a:buNone/>
+            </a:pPr>
+            <a:endParaRPr lang="en-US" i="1" dirty="0"/>
+          </a:p>
+          <a:p>
+            <a:pPr lvl="1"/>
+            <a:r>
+              <a:rPr lang="en-US" dirty="0"/>
+              <a:t>Solved with Singular Value Decomposition (SVD)		       that gives </a:t>
+            </a:r>
+          </a:p>
+          <a:p>
+            <a:r>
+              <a:rPr lang="en-US" dirty="0"/>
+              <a:t>We can write the code explicitly, without using open3D registration code, see</a:t>
+            </a:r>
+          </a:p>
+          <a:p>
+            <a:pPr lvl="1"/>
+            <a:r>
+              <a:rPr lang="en-US" dirty="0"/>
+              <a:t> icp_ex.py</a:t>
+            </a:r>
+            <a:endParaRPr lang="it-IT" dirty="0"/>
+          </a:p>
+          <a:p>
             <a:endParaRPr lang="it-IT" dirty="0"/>
           </a:p>
         </p:txBody>
@@ -6888,7 +7380,7 @@
           <a:p>
             <a:fld id="{80923155-F331-49A4-B9F6-FE2D65438435}" type="datetime1">
               <a:rPr lang="it-IT" smtClean="0"/>
-              <a:t>27/03/2026</a:t>
+              <a:t>01/04/2026</a:t>
             </a:fld>
             <a:endParaRPr lang="it-IT"/>
           </a:p>
@@ -6952,6 +7444,126 @@
           </a:p>
         </p:txBody>
       </p:sp>
+      <p:pic>
+        <p:nvPicPr>
+          <p:cNvPr id="9" name="Immagine 8">
+            <a:extLst>
+              <a:ext uri="{FF2B5EF4-FFF2-40B4-BE49-F238E27FC236}">
+                <a16:creationId xmlns:a16="http://schemas.microsoft.com/office/drawing/2014/main" id="{724A1837-69DE-9CA9-0E8E-0978E7F000CF}"/>
+              </a:ext>
+            </a:extLst>
+          </p:cNvPr>
+          <p:cNvPicPr>
+            <a:picLocks noChangeAspect="1"/>
+          </p:cNvPicPr>
+          <p:nvPr/>
+        </p:nvPicPr>
+        <p:blipFill>
+          <a:blip r:embed="rId3"/>
+          <a:stretch>
+            <a:fillRect/>
+          </a:stretch>
+        </p:blipFill>
+        <p:spPr>
+          <a:xfrm>
+            <a:off x="6841444" y="2626971"/>
+            <a:ext cx="2820621" cy="1033417"/>
+          </a:xfrm>
+          <a:prstGeom prst="rect">
+            <a:avLst/>
+          </a:prstGeom>
+        </p:spPr>
+      </p:pic>
+      <p:pic>
+        <p:nvPicPr>
+          <p:cNvPr id="12" name="Immagine 11">
+            <a:extLst>
+              <a:ext uri="{FF2B5EF4-FFF2-40B4-BE49-F238E27FC236}">
+                <a16:creationId xmlns:a16="http://schemas.microsoft.com/office/drawing/2014/main" id="{5521A2D1-A56B-0F38-9526-D348725B1024}"/>
+              </a:ext>
+            </a:extLst>
+          </p:cNvPr>
+          <p:cNvPicPr>
+            <a:picLocks noChangeAspect="1"/>
+          </p:cNvPicPr>
+          <p:nvPr/>
+        </p:nvPicPr>
+        <p:blipFill>
+          <a:blip r:embed="rId4"/>
+          <a:stretch>
+            <a:fillRect/>
+          </a:stretch>
+        </p:blipFill>
+        <p:spPr>
+          <a:xfrm>
+            <a:off x="10248279" y="3565524"/>
+            <a:ext cx="1485900" cy="428625"/>
+          </a:xfrm>
+          <a:prstGeom prst="rect">
+            <a:avLst/>
+          </a:prstGeom>
+        </p:spPr>
+      </p:pic>
+      <p:pic>
+        <p:nvPicPr>
+          <p:cNvPr id="18" name="Immagine 17">
+            <a:extLst>
+              <a:ext uri="{FF2B5EF4-FFF2-40B4-BE49-F238E27FC236}">
+                <a16:creationId xmlns:a16="http://schemas.microsoft.com/office/drawing/2014/main" id="{A1DC7504-841C-8D8A-E7AA-4C3ED0533450}"/>
+              </a:ext>
+            </a:extLst>
+          </p:cNvPr>
+          <p:cNvPicPr>
+            <a:picLocks noChangeAspect="1"/>
+          </p:cNvPicPr>
+          <p:nvPr/>
+        </p:nvPicPr>
+        <p:blipFill>
+          <a:blip r:embed="rId5"/>
+          <a:stretch>
+            <a:fillRect/>
+          </a:stretch>
+        </p:blipFill>
+        <p:spPr>
+          <a:xfrm>
+            <a:off x="7655991" y="5038010"/>
+            <a:ext cx="1571625" cy="323850"/>
+          </a:xfrm>
+          <a:prstGeom prst="rect">
+            <a:avLst/>
+          </a:prstGeom>
+        </p:spPr>
+      </p:pic>
+      <p:pic>
+        <p:nvPicPr>
+          <p:cNvPr id="21" name="Immagine 20">
+            <a:extLst>
+              <a:ext uri="{FF2B5EF4-FFF2-40B4-BE49-F238E27FC236}">
+                <a16:creationId xmlns:a16="http://schemas.microsoft.com/office/drawing/2014/main" id="{128A96DE-4EEC-129D-D1D4-7CEB741DB627}"/>
+              </a:ext>
+            </a:extLst>
+          </p:cNvPr>
+          <p:cNvPicPr>
+            <a:picLocks noChangeAspect="1"/>
+          </p:cNvPicPr>
+          <p:nvPr/>
+        </p:nvPicPr>
+        <p:blipFill>
+          <a:blip r:embed="rId6"/>
+          <a:stretch>
+            <a:fillRect/>
+          </a:stretch>
+        </p:blipFill>
+        <p:spPr>
+          <a:xfrm>
+            <a:off x="10824343" y="5065206"/>
+            <a:ext cx="1362075" cy="323850"/>
+          </a:xfrm>
+          <a:prstGeom prst="rect">
+            <a:avLst/>
+          </a:prstGeom>
+        </p:spPr>
+      </p:pic>
     </p:spTree>
     <p:extLst>
       <p:ext uri="{BB962C8B-B14F-4D97-AF65-F5344CB8AC3E}">
@@ -6987,555 +7599,6 @@
           <p:cNvPr id="2" name="Titolo 1">
             <a:extLst>
               <a:ext uri="{FF2B5EF4-FFF2-40B4-BE49-F238E27FC236}">
-                <a16:creationId xmlns:a16="http://schemas.microsoft.com/office/drawing/2014/main" id="{BE9ABF15-F1AB-F9A2-0974-B3B4D9C185B0}"/>
-              </a:ext>
-            </a:extLst>
-          </p:cNvPr>
-          <p:cNvSpPr>
-            <a:spLocks noGrp="1"/>
-          </p:cNvSpPr>
-          <p:nvPr>
-            <p:ph type="title"/>
-          </p:nvPr>
-        </p:nvSpPr>
-        <p:spPr/>
-        <p:txBody>
-          <a:bodyPr/>
-          <a:lstStyle/>
-          <a:p>
-            <a:r>
-              <a:rPr lang="en-US" dirty="0"/>
-              <a:t>Procrustes analysis</a:t>
-            </a:r>
-            <a:endParaRPr lang="it-IT" dirty="0"/>
-          </a:p>
-        </p:txBody>
-      </p:sp>
-      <p:sp>
-        <p:nvSpPr>
-          <p:cNvPr id="3" name="Segnaposto contenuto 2">
-            <a:extLst>
-              <a:ext uri="{FF2B5EF4-FFF2-40B4-BE49-F238E27FC236}">
-                <a16:creationId xmlns:a16="http://schemas.microsoft.com/office/drawing/2014/main" id="{CB3AB8F0-91D8-E8AA-E6E2-7623E0A2AA41}"/>
-              </a:ext>
-            </a:extLst>
-          </p:cNvPr>
-          <p:cNvSpPr>
-            <a:spLocks noGrp="1"/>
-          </p:cNvSpPr>
-          <p:nvPr>
-            <p:ph idx="1"/>
-          </p:nvPr>
-        </p:nvSpPr>
-        <p:spPr/>
-        <p:txBody>
-          <a:bodyPr/>
-          <a:lstStyle/>
-          <a:p>
-            <a:r>
-              <a:rPr lang="en-US" dirty="0"/>
-              <a:t>Procrustes analysis</a:t>
-            </a:r>
-          </a:p>
-          <a:p>
-            <a:pPr lvl="1"/>
-            <a:r>
-              <a:rPr lang="en-US" dirty="0"/>
-              <a:t>https://en.wikipedia.org/wiki/Procrustes_analysis</a:t>
-            </a:r>
-          </a:p>
-          <a:p>
-            <a:r>
-              <a:rPr lang="en-US" dirty="0"/>
-              <a:t>Steps</a:t>
-            </a:r>
-          </a:p>
-          <a:p>
-            <a:pPr lvl="1"/>
-            <a:r>
-              <a:rPr lang="en-US" dirty="0"/>
-              <a:t>Scaling of both configurations to the same size;</a:t>
-            </a:r>
-          </a:p>
-          <a:p>
-            <a:pPr lvl="1"/>
-            <a:r>
-              <a:rPr lang="en-US" dirty="0"/>
-              <a:t>Transposition to the same position of the center of gravity;</a:t>
-            </a:r>
-          </a:p>
-          <a:p>
-            <a:pPr lvl="1"/>
-            <a:r>
-              <a:rPr lang="en-US" dirty="0"/>
-              <a:t>Rotation to the orientation that provides the minimum sum of squared distances between corresponding landmarks.</a:t>
-            </a:r>
-            <a:endParaRPr lang="it-IT" dirty="0"/>
-          </a:p>
-        </p:txBody>
-      </p:sp>
-      <p:sp>
-        <p:nvSpPr>
-          <p:cNvPr id="4" name="Segnaposto data 3">
-            <a:extLst>
-              <a:ext uri="{FF2B5EF4-FFF2-40B4-BE49-F238E27FC236}">
-                <a16:creationId xmlns:a16="http://schemas.microsoft.com/office/drawing/2014/main" id="{65F362C4-A81E-B1B1-5EC7-32790C63FA0D}"/>
-              </a:ext>
-            </a:extLst>
-          </p:cNvPr>
-          <p:cNvSpPr>
-            <a:spLocks noGrp="1"/>
-          </p:cNvSpPr>
-          <p:nvPr>
-            <p:ph type="dt" sz="half" idx="10"/>
-          </p:nvPr>
-        </p:nvSpPr>
-        <p:spPr/>
-        <p:txBody>
-          <a:bodyPr/>
-          <a:lstStyle/>
-          <a:p>
-            <a:fld id="{7A62BE0F-D557-44B3-BF6A-3490D7124ADA}" type="datetime1">
-              <a:rPr lang="it-IT" smtClean="0"/>
-              <a:t>27/03/2026</a:t>
-            </a:fld>
-            <a:endParaRPr lang="it-IT"/>
-          </a:p>
-        </p:txBody>
-      </p:sp>
-      <p:sp>
-        <p:nvSpPr>
-          <p:cNvPr id="5" name="Segnaposto piè di pagina 4">
-            <a:extLst>
-              <a:ext uri="{FF2B5EF4-FFF2-40B4-BE49-F238E27FC236}">
-                <a16:creationId xmlns:a16="http://schemas.microsoft.com/office/drawing/2014/main" id="{697C0CE9-C0BB-867E-CF02-A903E86DCD2D}"/>
-              </a:ext>
-            </a:extLst>
-          </p:cNvPr>
-          <p:cNvSpPr>
-            <a:spLocks noGrp="1"/>
-          </p:cNvSpPr>
-          <p:nvPr>
-            <p:ph type="ftr" sz="quarter" idx="11"/>
-          </p:nvPr>
-        </p:nvSpPr>
-        <p:spPr/>
-        <p:txBody>
-          <a:bodyPr/>
-          <a:lstStyle/>
-          <a:p>
-            <a:r>
-              <a:rPr lang="it-IT"/>
-              <a:t>AVC 24/25</a:t>
-            </a:r>
-          </a:p>
-        </p:txBody>
-      </p:sp>
-      <p:sp>
-        <p:nvSpPr>
-          <p:cNvPr id="6" name="Segnaposto numero diapositiva 5">
-            <a:extLst>
-              <a:ext uri="{FF2B5EF4-FFF2-40B4-BE49-F238E27FC236}">
-                <a16:creationId xmlns:a16="http://schemas.microsoft.com/office/drawing/2014/main" id="{305E55F8-2A61-634F-9FFA-07F279D356B8}"/>
-              </a:ext>
-            </a:extLst>
-          </p:cNvPr>
-          <p:cNvSpPr>
-            <a:spLocks noGrp="1"/>
-          </p:cNvSpPr>
-          <p:nvPr>
-            <p:ph type="sldNum" sz="quarter" idx="12"/>
-          </p:nvPr>
-        </p:nvSpPr>
-        <p:spPr/>
-        <p:txBody>
-          <a:bodyPr/>
-          <a:lstStyle/>
-          <a:p>
-            <a:fld id="{8B04B791-897E-4328-B3FD-2D81E4AD606D}" type="slidenum">
-              <a:rPr lang="it-IT" smtClean="0"/>
-              <a:pPr/>
-              <a:t>6</a:t>
-            </a:fld>
-            <a:endParaRPr lang="it-IT"/>
-          </a:p>
-        </p:txBody>
-      </p:sp>
-      <p:pic>
-        <p:nvPicPr>
-          <p:cNvPr id="8" name="Immagine 7">
-            <a:extLst>
-              <a:ext uri="{FF2B5EF4-FFF2-40B4-BE49-F238E27FC236}">
-                <a16:creationId xmlns:a16="http://schemas.microsoft.com/office/drawing/2014/main" id="{9E648A22-3D3F-87DC-2042-4DBD33BEC5CA}"/>
-              </a:ext>
-            </a:extLst>
-          </p:cNvPr>
-          <p:cNvPicPr>
-            <a:picLocks noChangeAspect="1"/>
-          </p:cNvPicPr>
-          <p:nvPr/>
-        </p:nvPicPr>
-        <p:blipFill>
-          <a:blip r:embed="rId2"/>
-          <a:stretch>
-            <a:fillRect/>
-          </a:stretch>
-        </p:blipFill>
-        <p:spPr>
-          <a:xfrm>
-            <a:off x="6033464" y="4595068"/>
-            <a:ext cx="6733050" cy="2566814"/>
-          </a:xfrm>
-          <a:prstGeom prst="rect">
-            <a:avLst/>
-          </a:prstGeom>
-        </p:spPr>
-      </p:pic>
-      <p:pic>
-        <p:nvPicPr>
-          <p:cNvPr id="10" name="Immagine 9">
-            <a:extLst>
-              <a:ext uri="{FF2B5EF4-FFF2-40B4-BE49-F238E27FC236}">
-                <a16:creationId xmlns:a16="http://schemas.microsoft.com/office/drawing/2014/main" id="{DD5F06BF-1733-AF0A-CB3C-430FF70D8B29}"/>
-              </a:ext>
-            </a:extLst>
-          </p:cNvPr>
-          <p:cNvPicPr>
-            <a:picLocks noChangeAspect="1"/>
-          </p:cNvPicPr>
-          <p:nvPr/>
-        </p:nvPicPr>
-        <p:blipFill>
-          <a:blip r:embed="rId3"/>
-          <a:stretch>
-            <a:fillRect/>
-          </a:stretch>
-        </p:blipFill>
-        <p:spPr>
-          <a:xfrm>
-            <a:off x="9101268" y="971525"/>
-            <a:ext cx="3576327" cy="2678994"/>
-          </a:xfrm>
-          <a:prstGeom prst="rect">
-            <a:avLst/>
-          </a:prstGeom>
-        </p:spPr>
-      </p:pic>
-    </p:spTree>
-    <p:extLst>
-      <p:ext uri="{BB962C8B-B14F-4D97-AF65-F5344CB8AC3E}">
-        <p14:creationId xmlns:p14="http://schemas.microsoft.com/office/powerpoint/2010/main" val="2771692928"/>
-      </p:ext>
-    </p:extLst>
-  </p:cSld>
-  <p:clrMapOvr>
-    <a:masterClrMapping/>
-  </p:clrMapOvr>
-</p:sld>
-</file>
-
-<file path=ppt/slides/slide7.xml><?xml version="1.0" encoding="utf-8"?>
-<p:sld xmlns:a="http://schemas.openxmlformats.org/drawingml/2006/main" xmlns:r="http://schemas.openxmlformats.org/officeDocument/2006/relationships" xmlns:p="http://schemas.openxmlformats.org/presentationml/2006/main">
-  <p:cSld>
-    <p:spTree>
-      <p:nvGrpSpPr>
-        <p:cNvPr id="1" name=""/>
-        <p:cNvGrpSpPr/>
-        <p:nvPr/>
-      </p:nvGrpSpPr>
-      <p:grpSpPr>
-        <a:xfrm>
-          <a:off x="0" y="0"/>
-          <a:ext cx="0" cy="0"/>
-          <a:chOff x="0" y="0"/>
-          <a:chExt cx="0" cy="0"/>
-        </a:xfrm>
-      </p:grpSpPr>
-      <p:sp>
-        <p:nvSpPr>
-          <p:cNvPr id="2" name="Titolo 1">
-            <a:extLst>
-              <a:ext uri="{FF2B5EF4-FFF2-40B4-BE49-F238E27FC236}">
-                <a16:creationId xmlns:a16="http://schemas.microsoft.com/office/drawing/2014/main" id="{615E0D87-0E96-B4ED-6D8C-997DF0A75544}"/>
-              </a:ext>
-            </a:extLst>
-          </p:cNvPr>
-          <p:cNvSpPr>
-            <a:spLocks noGrp="1"/>
-          </p:cNvSpPr>
-          <p:nvPr>
-            <p:ph type="title"/>
-          </p:nvPr>
-        </p:nvSpPr>
-        <p:spPr/>
-        <p:txBody>
-          <a:bodyPr/>
-          <a:lstStyle/>
-          <a:p>
-            <a:r>
-              <a:rPr lang="en-US" dirty="0"/>
-              <a:t>Procrustes analysis</a:t>
-            </a:r>
-            <a:endParaRPr lang="it-IT" dirty="0"/>
-          </a:p>
-        </p:txBody>
-      </p:sp>
-      <p:sp>
-        <p:nvSpPr>
-          <p:cNvPr id="3" name="Segnaposto contenuto 2">
-            <a:extLst>
-              <a:ext uri="{FF2B5EF4-FFF2-40B4-BE49-F238E27FC236}">
-                <a16:creationId xmlns:a16="http://schemas.microsoft.com/office/drawing/2014/main" id="{86556B38-85B9-7290-EBA4-4773B5B15B63}"/>
-              </a:ext>
-            </a:extLst>
-          </p:cNvPr>
-          <p:cNvSpPr>
-            <a:spLocks noGrp="1"/>
-          </p:cNvSpPr>
-          <p:nvPr>
-            <p:ph idx="1"/>
-          </p:nvPr>
-        </p:nvSpPr>
-        <p:spPr/>
-        <p:txBody>
-          <a:bodyPr/>
-          <a:lstStyle/>
-          <a:p>
-            <a:r>
-              <a:rPr lang="en-US" dirty="0"/>
-              <a:t>Orthogonal </a:t>
-            </a:r>
-            <a:r>
-              <a:rPr lang="en-US" dirty="0" err="1"/>
-              <a:t>procrustes</a:t>
-            </a:r>
-            <a:r>
-              <a:rPr lang="en-US" dirty="0"/>
-              <a:t> problem</a:t>
-            </a:r>
-          </a:p>
-          <a:p>
-            <a:endParaRPr lang="en-US" dirty="0"/>
-          </a:p>
-          <a:p>
-            <a:endParaRPr lang="en-US" dirty="0"/>
-          </a:p>
-          <a:p>
-            <a:endParaRPr lang="en-US" dirty="0"/>
-          </a:p>
-          <a:p>
-            <a:r>
-              <a:rPr lang="en-US" dirty="0"/>
-              <a:t>The solution is obtained with the singular value decomposition</a:t>
-            </a:r>
-          </a:p>
-          <a:p>
-            <a:endParaRPr lang="en-US" dirty="0"/>
-          </a:p>
-          <a:p>
-            <a:pPr marL="108000" indent="0">
-              <a:buNone/>
-            </a:pPr>
-            <a:endParaRPr lang="en-US" dirty="0"/>
-          </a:p>
-          <a:p>
-            <a:r>
-              <a:rPr lang="en-US" dirty="0"/>
-              <a:t>We can write the code explicitly, without using library functions</a:t>
-            </a:r>
-          </a:p>
-          <a:p>
-            <a:pPr lvl="1"/>
-            <a:r>
-              <a:rPr lang="en-US" dirty="0"/>
-              <a:t> icp_ex.py</a:t>
-            </a:r>
-            <a:endParaRPr lang="it-IT" dirty="0"/>
-          </a:p>
-        </p:txBody>
-      </p:sp>
-      <p:sp>
-        <p:nvSpPr>
-          <p:cNvPr id="4" name="Segnaposto data 3">
-            <a:extLst>
-              <a:ext uri="{FF2B5EF4-FFF2-40B4-BE49-F238E27FC236}">
-                <a16:creationId xmlns:a16="http://schemas.microsoft.com/office/drawing/2014/main" id="{62BF6F74-A071-AA6E-74D3-6B16B7CAE7DB}"/>
-              </a:ext>
-            </a:extLst>
-          </p:cNvPr>
-          <p:cNvSpPr>
-            <a:spLocks noGrp="1"/>
-          </p:cNvSpPr>
-          <p:nvPr>
-            <p:ph type="dt" sz="half" idx="10"/>
-          </p:nvPr>
-        </p:nvSpPr>
-        <p:spPr/>
-        <p:txBody>
-          <a:bodyPr/>
-          <a:lstStyle/>
-          <a:p>
-            <a:fld id="{E51B4162-37B4-4274-8972-FF1D677198B7}" type="datetime1">
-              <a:rPr lang="it-IT" smtClean="0"/>
-              <a:t>27/03/2026</a:t>
-            </a:fld>
-            <a:endParaRPr lang="it-IT"/>
-          </a:p>
-        </p:txBody>
-      </p:sp>
-      <p:sp>
-        <p:nvSpPr>
-          <p:cNvPr id="5" name="Segnaposto piè di pagina 4">
-            <a:extLst>
-              <a:ext uri="{FF2B5EF4-FFF2-40B4-BE49-F238E27FC236}">
-                <a16:creationId xmlns:a16="http://schemas.microsoft.com/office/drawing/2014/main" id="{DCAB86C3-1064-9FFB-BE1A-4CF70197231E}"/>
-              </a:ext>
-            </a:extLst>
-          </p:cNvPr>
-          <p:cNvSpPr>
-            <a:spLocks noGrp="1"/>
-          </p:cNvSpPr>
-          <p:nvPr>
-            <p:ph type="ftr" sz="quarter" idx="11"/>
-          </p:nvPr>
-        </p:nvSpPr>
-        <p:spPr/>
-        <p:txBody>
-          <a:bodyPr/>
-          <a:lstStyle/>
-          <a:p>
-            <a:r>
-              <a:rPr lang="it-IT"/>
-              <a:t>AVC 24/25</a:t>
-            </a:r>
-          </a:p>
-        </p:txBody>
-      </p:sp>
-      <p:sp>
-        <p:nvSpPr>
-          <p:cNvPr id="6" name="Segnaposto numero diapositiva 5">
-            <a:extLst>
-              <a:ext uri="{FF2B5EF4-FFF2-40B4-BE49-F238E27FC236}">
-                <a16:creationId xmlns:a16="http://schemas.microsoft.com/office/drawing/2014/main" id="{BD4C650E-654D-69D0-B594-8A1C244F228C}"/>
-              </a:ext>
-            </a:extLst>
-          </p:cNvPr>
-          <p:cNvSpPr>
-            <a:spLocks noGrp="1"/>
-          </p:cNvSpPr>
-          <p:nvPr>
-            <p:ph type="sldNum" sz="quarter" idx="12"/>
-          </p:nvPr>
-        </p:nvSpPr>
-        <p:spPr/>
-        <p:txBody>
-          <a:bodyPr/>
-          <a:lstStyle/>
-          <a:p>
-            <a:fld id="{8B04B791-897E-4328-B3FD-2D81E4AD606D}" type="slidenum">
-              <a:rPr lang="it-IT" smtClean="0"/>
-              <a:pPr/>
-              <a:t>7</a:t>
-            </a:fld>
-            <a:endParaRPr lang="it-IT"/>
-          </a:p>
-        </p:txBody>
-      </p:sp>
-      <p:pic>
-        <p:nvPicPr>
-          <p:cNvPr id="8" name="Immagine 7">
-            <a:extLst>
-              <a:ext uri="{FF2B5EF4-FFF2-40B4-BE49-F238E27FC236}">
-                <a16:creationId xmlns:a16="http://schemas.microsoft.com/office/drawing/2014/main" id="{07F531CE-EB4C-1DDF-4B95-9A85699BAFC3}"/>
-              </a:ext>
-            </a:extLst>
-          </p:cNvPr>
-          <p:cNvPicPr>
-            <a:picLocks noChangeAspect="1"/>
-          </p:cNvPicPr>
-          <p:nvPr/>
-        </p:nvPicPr>
-        <p:blipFill>
-          <a:blip r:embed="rId2"/>
-          <a:stretch>
-            <a:fillRect/>
-          </a:stretch>
-        </p:blipFill>
-        <p:spPr>
-          <a:xfrm>
-            <a:off x="6719473" y="1681200"/>
-            <a:ext cx="4419600" cy="1619250"/>
-          </a:xfrm>
-          <a:prstGeom prst="rect">
-            <a:avLst/>
-          </a:prstGeom>
-        </p:spPr>
-      </p:pic>
-      <p:pic>
-        <p:nvPicPr>
-          <p:cNvPr id="10" name="Immagine 9">
-            <a:extLst>
-              <a:ext uri="{FF2B5EF4-FFF2-40B4-BE49-F238E27FC236}">
-                <a16:creationId xmlns:a16="http://schemas.microsoft.com/office/drawing/2014/main" id="{0457A29A-E6EF-FFD6-F577-9F802932E5EC}"/>
-              </a:ext>
-            </a:extLst>
-          </p:cNvPr>
-          <p:cNvPicPr>
-            <a:picLocks noChangeAspect="1"/>
-          </p:cNvPicPr>
-          <p:nvPr/>
-        </p:nvPicPr>
-        <p:blipFill>
-          <a:blip r:embed="rId3"/>
-          <a:stretch>
-            <a:fillRect/>
-          </a:stretch>
-        </p:blipFill>
-        <p:spPr>
-          <a:xfrm>
-            <a:off x="10170908" y="3697513"/>
-            <a:ext cx="1936329" cy="1261097"/>
-          </a:xfrm>
-          <a:prstGeom prst="rect">
-            <a:avLst/>
-          </a:prstGeom>
-        </p:spPr>
-      </p:pic>
-    </p:spTree>
-    <p:extLst>
-      <p:ext uri="{BB962C8B-B14F-4D97-AF65-F5344CB8AC3E}">
-        <p14:creationId xmlns:p14="http://schemas.microsoft.com/office/powerpoint/2010/main" val="3355352230"/>
-      </p:ext>
-    </p:extLst>
-  </p:cSld>
-  <p:clrMapOvr>
-    <a:masterClrMapping/>
-  </p:clrMapOvr>
-</p:sld>
-</file>
-
-<file path=ppt/slides/slide8.xml><?xml version="1.0" encoding="utf-8"?>
-<p:sld xmlns:a="http://schemas.openxmlformats.org/drawingml/2006/main" xmlns:r="http://schemas.openxmlformats.org/officeDocument/2006/relationships" xmlns:p="http://schemas.openxmlformats.org/presentationml/2006/main">
-  <p:cSld>
-    <p:spTree>
-      <p:nvGrpSpPr>
-        <p:cNvPr id="1" name=""/>
-        <p:cNvGrpSpPr/>
-        <p:nvPr/>
-      </p:nvGrpSpPr>
-      <p:grpSpPr>
-        <a:xfrm>
-          <a:off x="0" y="0"/>
-          <a:ext cx="0" cy="0"/>
-          <a:chOff x="0" y="0"/>
-          <a:chExt cx="0" cy="0"/>
-        </a:xfrm>
-      </p:grpSpPr>
-      <p:sp>
-        <p:nvSpPr>
-          <p:cNvPr id="2" name="Titolo 1">
-            <a:extLst>
-              <a:ext uri="{FF2B5EF4-FFF2-40B4-BE49-F238E27FC236}">
                 <a16:creationId xmlns:a16="http://schemas.microsoft.com/office/drawing/2014/main" id="{B9162B89-D763-DF88-C7DF-18EB598259D1}"/>
               </a:ext>
             </a:extLst>
@@ -7590,7 +7653,7 @@
           <a:p>
             <a:r>
               <a:rPr lang="en-US" dirty="0"/>
-              <a:t>See</a:t>
+              <a:t>See https://www.open3d.org/docs/release/tutorial/pipelines/index.html</a:t>
             </a:r>
           </a:p>
           <a:p>
@@ -7654,7 +7717,7 @@
             </a:r>
           </a:p>
           <a:p>
-            <a:pPr lvl="1"/>
+            <a:pPr lvl="2"/>
             <a:r>
               <a:rPr lang="it-IT" dirty="0"/>
               <a:t>https://www.open3d.org/docs/release/tutorial/pipelines/global_registration.html</a:t>
@@ -7685,7 +7748,7 @@
           <a:p>
             <a:fld id="{065005EB-D55B-4494-9DD1-B809D32BC6F2}" type="datetime1">
               <a:rPr lang="it-IT" smtClean="0"/>
-              <a:t>27/03/2026</a:t>
+              <a:t>01/04/2026</a:t>
             </a:fld>
             <a:endParaRPr lang="it-IT"/>
           </a:p>
@@ -7743,7 +7806,7 @@
             <a:fld id="{8B04B791-897E-4328-B3FD-2D81E4AD606D}" type="slidenum">
               <a:rPr lang="it-IT" smtClean="0"/>
               <a:pPr/>
-              <a:t>8</a:t>
+              <a:t>6</a:t>
             </a:fld>
             <a:endParaRPr lang="it-IT"/>
           </a:p>
@@ -7827,7 +7890,7 @@
 </p:sld>
 </file>
 
-<file path=ppt/slides/slide9.xml><?xml version="1.0" encoding="utf-8"?>
+<file path=ppt/slides/slide7.xml><?xml version="1.0" encoding="utf-8"?>
 <p:sld xmlns:a="http://schemas.openxmlformats.org/drawingml/2006/main" xmlns:r="http://schemas.openxmlformats.org/officeDocument/2006/relationships" xmlns:p="http://schemas.openxmlformats.org/presentationml/2006/main">
   <p:cSld>
     <p:spTree>
@@ -7959,7 +8022,7 @@
           <a:p>
             <a:fld id="{A41D7EFB-AC36-469E-832F-6A302A734BC9}" type="datetime1">
               <a:rPr lang="it-IT" smtClean="0"/>
-              <a:t>27/03/2026</a:t>
+              <a:t>01/04/2026</a:t>
             </a:fld>
             <a:endParaRPr lang="it-IT"/>
           </a:p>
@@ -8017,7 +8080,7 @@
             <a:fld id="{8B04B791-897E-4328-B3FD-2D81E4AD606D}" type="slidenum">
               <a:rPr lang="it-IT" smtClean="0"/>
               <a:pPr/>
-              <a:t>9</a:t>
+              <a:t>7</a:t>
             </a:fld>
             <a:endParaRPr lang="it-IT"/>
           </a:p>
@@ -8152,6 +8215,574 @@
     <p:extLst>
       <p:ext uri="{BB962C8B-B14F-4D97-AF65-F5344CB8AC3E}">
         <p14:creationId xmlns:p14="http://schemas.microsoft.com/office/powerpoint/2010/main" val="2335972290"/>
+      </p:ext>
+    </p:extLst>
+  </p:cSld>
+  <p:clrMapOvr>
+    <a:masterClrMapping/>
+  </p:clrMapOvr>
+</p:sld>
+</file>
+
+<file path=ppt/slides/slide8.xml><?xml version="1.0" encoding="utf-8"?>
+<p:sld xmlns:a="http://schemas.openxmlformats.org/drawingml/2006/main" xmlns:r="http://schemas.openxmlformats.org/officeDocument/2006/relationships" xmlns:p="http://schemas.openxmlformats.org/presentationml/2006/main">
+  <p:cSld>
+    <p:spTree>
+      <p:nvGrpSpPr>
+        <p:cNvPr id="1" name=""/>
+        <p:cNvGrpSpPr/>
+        <p:nvPr/>
+      </p:nvGrpSpPr>
+      <p:grpSpPr>
+        <a:xfrm>
+          <a:off x="0" y="0"/>
+          <a:ext cx="0" cy="0"/>
+          <a:chOff x="0" y="0"/>
+          <a:chExt cx="0" cy="0"/>
+        </a:xfrm>
+      </p:grpSpPr>
+      <p:sp>
+        <p:nvSpPr>
+          <p:cNvPr id="2" name="Titolo 1">
+            <a:extLst>
+              <a:ext uri="{FF2B5EF4-FFF2-40B4-BE49-F238E27FC236}">
+                <a16:creationId xmlns:a16="http://schemas.microsoft.com/office/drawing/2014/main" id="{28487AD3-7D20-B15E-4EC5-F5F82697D4C5}"/>
+              </a:ext>
+            </a:extLst>
+          </p:cNvPr>
+          <p:cNvSpPr>
+            <a:spLocks noGrp="1"/>
+          </p:cNvSpPr>
+          <p:nvPr>
+            <p:ph type="title"/>
+          </p:nvPr>
+        </p:nvSpPr>
+        <p:spPr/>
+        <p:txBody>
+          <a:bodyPr/>
+          <a:lstStyle/>
+          <a:p>
+            <a:r>
+              <a:rPr lang="it-IT" dirty="0"/>
+              <a:t>FPFH (Fast Point Feature </a:t>
+            </a:r>
+            <a:r>
+              <a:rPr lang="it-IT" dirty="0" err="1"/>
+              <a:t>Histogram</a:t>
+            </a:r>
+            <a:r>
+              <a:rPr lang="it-IT" dirty="0"/>
+              <a:t>), </a:t>
+            </a:r>
+          </a:p>
+        </p:txBody>
+      </p:sp>
+      <p:sp>
+        <p:nvSpPr>
+          <p:cNvPr id="3" name="Segnaposto contenuto 2">
+            <a:extLst>
+              <a:ext uri="{FF2B5EF4-FFF2-40B4-BE49-F238E27FC236}">
+                <a16:creationId xmlns:a16="http://schemas.microsoft.com/office/drawing/2014/main" id="{A1BF9716-897D-FDEA-4D86-9D9D0DF9C99F}"/>
+              </a:ext>
+            </a:extLst>
+          </p:cNvPr>
+          <p:cNvSpPr>
+            <a:spLocks noGrp="1"/>
+          </p:cNvSpPr>
+          <p:nvPr>
+            <p:ph idx="1"/>
+          </p:nvPr>
+        </p:nvSpPr>
+        <p:spPr/>
+        <p:txBody>
+          <a:bodyPr/>
+          <a:lstStyle/>
+          <a:p>
+            <a:r>
+              <a:rPr lang="it-IT" dirty="0"/>
+              <a:t>From PCL https://pcl.readthedocs.io/</a:t>
+            </a:r>
+          </a:p>
+        </p:txBody>
+      </p:sp>
+      <p:sp>
+        <p:nvSpPr>
+          <p:cNvPr id="4" name="Segnaposto data 3">
+            <a:extLst>
+              <a:ext uri="{FF2B5EF4-FFF2-40B4-BE49-F238E27FC236}">
+                <a16:creationId xmlns:a16="http://schemas.microsoft.com/office/drawing/2014/main" id="{F0DF5378-5B57-FA21-ABA9-AC7A5B2C6956}"/>
+              </a:ext>
+            </a:extLst>
+          </p:cNvPr>
+          <p:cNvSpPr>
+            <a:spLocks noGrp="1"/>
+          </p:cNvSpPr>
+          <p:nvPr>
+            <p:ph type="dt" sz="half" idx="10"/>
+          </p:nvPr>
+        </p:nvSpPr>
+        <p:spPr/>
+        <p:txBody>
+          <a:bodyPr/>
+          <a:lstStyle/>
+          <a:p>
+            <a:fld id="{A41D7EFB-AC36-469E-832F-6A302A734BC9}" type="datetime1">
+              <a:rPr lang="it-IT" smtClean="0"/>
+              <a:t>01/04/2026</a:t>
+            </a:fld>
+            <a:endParaRPr lang="it-IT"/>
+          </a:p>
+        </p:txBody>
+      </p:sp>
+      <p:sp>
+        <p:nvSpPr>
+          <p:cNvPr id="5" name="Segnaposto piè di pagina 4">
+            <a:extLst>
+              <a:ext uri="{FF2B5EF4-FFF2-40B4-BE49-F238E27FC236}">
+                <a16:creationId xmlns:a16="http://schemas.microsoft.com/office/drawing/2014/main" id="{80E76996-6748-AC0A-2455-B4A260230493}"/>
+              </a:ext>
+            </a:extLst>
+          </p:cNvPr>
+          <p:cNvSpPr>
+            <a:spLocks noGrp="1"/>
+          </p:cNvSpPr>
+          <p:nvPr>
+            <p:ph type="ftr" sz="quarter" idx="11"/>
+          </p:nvPr>
+        </p:nvSpPr>
+        <p:spPr/>
+        <p:txBody>
+          <a:bodyPr/>
+          <a:lstStyle/>
+          <a:p>
+            <a:r>
+              <a:rPr lang="it-IT"/>
+              <a:t>AVC 24/25</a:t>
+            </a:r>
+          </a:p>
+        </p:txBody>
+      </p:sp>
+      <p:sp>
+        <p:nvSpPr>
+          <p:cNvPr id="6" name="Segnaposto numero diapositiva 5">
+            <a:extLst>
+              <a:ext uri="{FF2B5EF4-FFF2-40B4-BE49-F238E27FC236}">
+                <a16:creationId xmlns:a16="http://schemas.microsoft.com/office/drawing/2014/main" id="{84EF1E8E-92A9-4822-B9B5-6BBF38F3E1B2}"/>
+              </a:ext>
+            </a:extLst>
+          </p:cNvPr>
+          <p:cNvSpPr>
+            <a:spLocks noGrp="1"/>
+          </p:cNvSpPr>
+          <p:nvPr>
+            <p:ph type="sldNum" sz="quarter" idx="12"/>
+          </p:nvPr>
+        </p:nvSpPr>
+        <p:spPr/>
+        <p:txBody>
+          <a:bodyPr/>
+          <a:lstStyle/>
+          <a:p>
+            <a:fld id="{8B04B791-897E-4328-B3FD-2D81E4AD606D}" type="slidenum">
+              <a:rPr lang="it-IT" smtClean="0"/>
+              <a:pPr/>
+              <a:t>8</a:t>
+            </a:fld>
+            <a:endParaRPr lang="it-IT"/>
+          </a:p>
+        </p:txBody>
+      </p:sp>
+      <p:pic>
+        <p:nvPicPr>
+          <p:cNvPr id="8" name="Immagine 7">
+            <a:extLst>
+              <a:ext uri="{FF2B5EF4-FFF2-40B4-BE49-F238E27FC236}">
+                <a16:creationId xmlns:a16="http://schemas.microsoft.com/office/drawing/2014/main" id="{5A4FAA75-9CD0-8239-6DF8-5C52F8AFBA88}"/>
+              </a:ext>
+            </a:extLst>
+          </p:cNvPr>
+          <p:cNvPicPr>
+            <a:picLocks noChangeAspect="1"/>
+          </p:cNvPicPr>
+          <p:nvPr/>
+        </p:nvPicPr>
+        <p:blipFill>
+          <a:blip r:embed="rId2"/>
+          <a:stretch>
+            <a:fillRect/>
+          </a:stretch>
+        </p:blipFill>
+        <p:spPr>
+          <a:xfrm>
+            <a:off x="2831454" y="2339240"/>
+            <a:ext cx="10025293" cy="4895233"/>
+          </a:xfrm>
+          <a:prstGeom prst="rect">
+            <a:avLst/>
+          </a:prstGeom>
+        </p:spPr>
+      </p:pic>
+    </p:spTree>
+    <p:extLst>
+      <p:ext uri="{BB962C8B-B14F-4D97-AF65-F5344CB8AC3E}">
+        <p14:creationId xmlns:p14="http://schemas.microsoft.com/office/powerpoint/2010/main" val="1991391201"/>
+      </p:ext>
+    </p:extLst>
+  </p:cSld>
+  <p:clrMapOvr>
+    <a:masterClrMapping/>
+  </p:clrMapOvr>
+</p:sld>
+</file>
+
+<file path=ppt/slides/slide9.xml><?xml version="1.0" encoding="utf-8"?>
+<p:sld xmlns:a="http://schemas.openxmlformats.org/drawingml/2006/main" xmlns:r="http://schemas.openxmlformats.org/officeDocument/2006/relationships" xmlns:p="http://schemas.openxmlformats.org/presentationml/2006/main">
+  <p:cSld>
+    <p:spTree>
+      <p:nvGrpSpPr>
+        <p:cNvPr id="1" name=""/>
+        <p:cNvGrpSpPr/>
+        <p:nvPr/>
+      </p:nvGrpSpPr>
+      <p:grpSpPr>
+        <a:xfrm>
+          <a:off x="0" y="0"/>
+          <a:ext cx="0" cy="0"/>
+          <a:chOff x="0" y="0"/>
+          <a:chExt cx="0" cy="0"/>
+        </a:xfrm>
+      </p:grpSpPr>
+      <p:sp>
+        <p:nvSpPr>
+          <p:cNvPr id="2" name="Titolo 1">
+            <a:extLst>
+              <a:ext uri="{FF2B5EF4-FFF2-40B4-BE49-F238E27FC236}">
+                <a16:creationId xmlns:a16="http://schemas.microsoft.com/office/drawing/2014/main" id="{D0F99C38-6E20-C9B0-6FB4-3CB14A65B2DB}"/>
+              </a:ext>
+            </a:extLst>
+          </p:cNvPr>
+          <p:cNvSpPr>
+            <a:spLocks noGrp="1"/>
+          </p:cNvSpPr>
+          <p:nvPr>
+            <p:ph type="title"/>
+          </p:nvPr>
+        </p:nvSpPr>
+        <p:spPr>
+          <a:xfrm>
+            <a:off x="762180" y="122400"/>
+            <a:ext cx="12094568" cy="1262160"/>
+          </a:xfrm>
+        </p:spPr>
+        <p:txBody>
+          <a:bodyPr/>
+          <a:lstStyle/>
+          <a:p>
+            <a:r>
+              <a:rPr lang="it-IT" dirty="0" err="1"/>
+              <a:t>Homework</a:t>
+            </a:r>
+            <a:endParaRPr lang="it-IT" dirty="0"/>
+          </a:p>
+        </p:txBody>
+      </p:sp>
+      <p:sp>
+        <p:nvSpPr>
+          <p:cNvPr id="3" name="Segnaposto contenuto 2">
+            <a:extLst>
+              <a:ext uri="{FF2B5EF4-FFF2-40B4-BE49-F238E27FC236}">
+                <a16:creationId xmlns:a16="http://schemas.microsoft.com/office/drawing/2014/main" id="{74496F0C-E304-13E3-012C-E8AC1AE3A0AD}"/>
+              </a:ext>
+            </a:extLst>
+          </p:cNvPr>
+          <p:cNvSpPr>
+            <a:spLocks noGrp="1"/>
+          </p:cNvSpPr>
+          <p:nvPr>
+            <p:ph idx="1"/>
+          </p:nvPr>
+        </p:nvSpPr>
+        <p:spPr>
+          <a:xfrm>
+            <a:off x="582196" y="1681200"/>
+            <a:ext cx="12274555" cy="4989600"/>
+          </a:xfrm>
+        </p:spPr>
+        <p:txBody>
+          <a:bodyPr/>
+          <a:lstStyle/>
+          <a:p>
+            <a:r>
+              <a:rPr lang="it-IT" dirty="0" err="1"/>
+              <a:t>Consider</a:t>
+            </a:r>
+            <a:r>
+              <a:rPr lang="it-IT" dirty="0"/>
+              <a:t> the point clouds of the </a:t>
+            </a:r>
+            <a:r>
+              <a:rPr lang="it-IT" dirty="0" err="1"/>
+              <a:t>partial</a:t>
+            </a:r>
+            <a:r>
+              <a:rPr lang="it-IT" dirty="0"/>
+              <a:t> </a:t>
+            </a:r>
+            <a:r>
+              <a:rPr lang="it-IT" dirty="0" err="1"/>
+              <a:t>scans</a:t>
+            </a:r>
+            <a:endParaRPr lang="it-IT" dirty="0"/>
+          </a:p>
+          <a:p>
+            <a:pPr lvl="1"/>
+            <a:r>
+              <a:rPr lang="it-IT" dirty="0"/>
+              <a:t>Part1.ply</a:t>
+            </a:r>
+          </a:p>
+          <a:p>
+            <a:pPr lvl="1"/>
+            <a:r>
+              <a:rPr lang="it-IT" dirty="0"/>
+              <a:t>Part2.ply</a:t>
+            </a:r>
+          </a:p>
+          <a:p>
+            <a:r>
+              <a:rPr lang="it-IT" dirty="0"/>
+              <a:t>Using the </a:t>
+            </a:r>
+            <a:r>
+              <a:rPr lang="it-IT" dirty="0" err="1"/>
+              <a:t>functions</a:t>
+            </a:r>
+            <a:r>
+              <a:rPr lang="it-IT" dirty="0"/>
+              <a:t> </a:t>
+            </a:r>
+            <a:r>
+              <a:rPr lang="it-IT" dirty="0" err="1"/>
+              <a:t>seen</a:t>
+            </a:r>
+            <a:r>
+              <a:rPr lang="it-IT" dirty="0"/>
+              <a:t> in the tutorial, </a:t>
+            </a:r>
+            <a:r>
+              <a:rPr lang="it-IT" dirty="0" err="1"/>
+              <a:t>try</a:t>
+            </a:r>
+            <a:r>
+              <a:rPr lang="it-IT" dirty="0"/>
+              <a:t> to </a:t>
+            </a:r>
+          </a:p>
+          <a:p>
+            <a:pPr lvl="1"/>
+            <a:r>
+              <a:rPr lang="it-IT" dirty="0"/>
+              <a:t>Estimate with feature-</a:t>
+            </a:r>
+            <a:r>
+              <a:rPr lang="it-IT" dirty="0" err="1"/>
+              <a:t>based</a:t>
+            </a:r>
+            <a:r>
+              <a:rPr lang="it-IT" dirty="0"/>
+              <a:t> </a:t>
+            </a:r>
+            <a:r>
+              <a:rPr lang="it-IT" dirty="0" err="1"/>
+              <a:t>robust</a:t>
+            </a:r>
+            <a:r>
+              <a:rPr lang="it-IT" dirty="0"/>
+              <a:t> matching the </a:t>
+            </a:r>
+            <a:r>
+              <a:rPr lang="it-IT" dirty="0" err="1"/>
+              <a:t>transform</a:t>
+            </a:r>
+            <a:r>
+              <a:rPr lang="it-IT" dirty="0"/>
+              <a:t> and </a:t>
+            </a:r>
+            <a:r>
+              <a:rPr lang="it-IT" dirty="0" err="1"/>
+              <a:t>refine</a:t>
+            </a:r>
+            <a:r>
+              <a:rPr lang="it-IT" dirty="0"/>
+              <a:t> with ICP</a:t>
+            </a:r>
+          </a:p>
+          <a:p>
+            <a:pPr lvl="1"/>
+            <a:r>
+              <a:rPr lang="it-IT" dirty="0"/>
+              <a:t>Create a </a:t>
+            </a:r>
+            <a:r>
+              <a:rPr lang="it-IT" dirty="0" err="1"/>
+              <a:t>merged</a:t>
+            </a:r>
+            <a:r>
+              <a:rPr lang="it-IT" dirty="0"/>
+              <a:t>, </a:t>
+            </a:r>
+            <a:r>
+              <a:rPr lang="it-IT" dirty="0" err="1"/>
+              <a:t>registered</a:t>
+            </a:r>
+            <a:r>
+              <a:rPr lang="it-IT" dirty="0"/>
+              <a:t> point cloud </a:t>
+            </a:r>
+          </a:p>
+          <a:p>
+            <a:pPr lvl="1"/>
+            <a:r>
+              <a:rPr lang="it-IT" dirty="0"/>
+              <a:t>(optional: mesh </a:t>
+            </a:r>
+            <a:r>
+              <a:rPr lang="it-IT" dirty="0" err="1"/>
+              <a:t>using</a:t>
+            </a:r>
+            <a:r>
+              <a:rPr lang="it-IT" dirty="0"/>
+              <a:t> Poisson </a:t>
+            </a:r>
+            <a:r>
+              <a:rPr lang="it-IT" dirty="0" err="1"/>
+              <a:t>using</a:t>
+            </a:r>
+            <a:r>
+              <a:rPr lang="it-IT" dirty="0"/>
+              <a:t> </a:t>
+            </a:r>
+            <a:r>
+              <a:rPr lang="it-IT" dirty="0" err="1"/>
+              <a:t>meshlab</a:t>
+            </a:r>
+            <a:r>
+              <a:rPr lang="it-IT" dirty="0"/>
+              <a:t>)</a:t>
+            </a:r>
+          </a:p>
+          <a:p>
+            <a:pPr lvl="1"/>
+            <a:endParaRPr lang="it-IT" dirty="0"/>
+          </a:p>
+        </p:txBody>
+      </p:sp>
+      <p:sp>
+        <p:nvSpPr>
+          <p:cNvPr id="4" name="Segnaposto data 3">
+            <a:extLst>
+              <a:ext uri="{FF2B5EF4-FFF2-40B4-BE49-F238E27FC236}">
+                <a16:creationId xmlns:a16="http://schemas.microsoft.com/office/drawing/2014/main" id="{1D485F38-DEC1-38E4-37EB-BAA4F94AD01D}"/>
+              </a:ext>
+            </a:extLst>
+          </p:cNvPr>
+          <p:cNvSpPr>
+            <a:spLocks noGrp="1"/>
+          </p:cNvSpPr>
+          <p:nvPr>
+            <p:ph type="dt" sz="half" idx="10"/>
+          </p:nvPr>
+        </p:nvSpPr>
+        <p:spPr>
+          <a:xfrm>
+            <a:off x="671946" y="7058520"/>
+            <a:ext cx="3130793" cy="349920"/>
+          </a:xfrm>
+        </p:spPr>
+        <p:txBody>
+          <a:bodyPr/>
+          <a:lstStyle/>
+          <a:p>
+            <a:fld id="{7E72A12E-10B4-4B10-B907-CFB580FFDFA1}" type="datetime1">
+              <a:rPr lang="it-IT" smtClean="0"/>
+              <a:t>01/04/2026</a:t>
+            </a:fld>
+            <a:endParaRPr lang="it-IT"/>
+          </a:p>
+        </p:txBody>
+      </p:sp>
+      <p:sp>
+        <p:nvSpPr>
+          <p:cNvPr id="5" name="Segnaposto piè di pagina 4">
+            <a:extLst>
+              <a:ext uri="{FF2B5EF4-FFF2-40B4-BE49-F238E27FC236}">
+                <a16:creationId xmlns:a16="http://schemas.microsoft.com/office/drawing/2014/main" id="{A9EC0DC2-12FE-2BCE-E545-798AE5728618}"/>
+              </a:ext>
+            </a:extLst>
+          </p:cNvPr>
+          <p:cNvSpPr>
+            <a:spLocks noGrp="1"/>
+          </p:cNvSpPr>
+          <p:nvPr>
+            <p:ph type="ftr" sz="quarter" idx="11"/>
+          </p:nvPr>
+        </p:nvSpPr>
+        <p:spPr>
+          <a:xfrm>
+            <a:off x="4596118" y="7041605"/>
+            <a:ext cx="4259665" cy="366839"/>
+          </a:xfrm>
+        </p:spPr>
+        <p:txBody>
+          <a:bodyPr/>
+          <a:lstStyle/>
+          <a:p>
+            <a:r>
+              <a:rPr lang="it-IT"/>
+              <a:t>AVC 24/25</a:t>
+            </a:r>
+          </a:p>
+        </p:txBody>
+      </p:sp>
+      <p:sp>
+        <p:nvSpPr>
+          <p:cNvPr id="6" name="Segnaposto numero diapositiva 5">
+            <a:extLst>
+              <a:ext uri="{FF2B5EF4-FFF2-40B4-BE49-F238E27FC236}">
+                <a16:creationId xmlns:a16="http://schemas.microsoft.com/office/drawing/2014/main" id="{D08DB457-9407-4344-FE8E-53A014DDA74A}"/>
+              </a:ext>
+            </a:extLst>
+          </p:cNvPr>
+          <p:cNvSpPr>
+            <a:spLocks noGrp="1"/>
+          </p:cNvSpPr>
+          <p:nvPr>
+            <p:ph type="sldNum" sz="quarter" idx="12"/>
+          </p:nvPr>
+        </p:nvSpPr>
+        <p:spPr>
+          <a:xfrm>
+            <a:off x="9635721" y="7058520"/>
+            <a:ext cx="3130793" cy="349920"/>
+          </a:xfrm>
+        </p:spPr>
+        <p:txBody>
+          <a:bodyPr/>
+          <a:lstStyle/>
+          <a:p>
+            <a:fld id="{8B04B791-897E-4328-B3FD-2D81E4AD606D}" type="slidenum">
+              <a:rPr lang="it-IT" smtClean="0"/>
+              <a:pPr/>
+              <a:t>9</a:t>
+            </a:fld>
+            <a:endParaRPr lang="it-IT"/>
+          </a:p>
+        </p:txBody>
+      </p:sp>
+    </p:spTree>
+    <p:extLst>
+      <p:ext uri="{BB962C8B-B14F-4D97-AF65-F5344CB8AC3E}">
+        <p14:creationId xmlns:p14="http://schemas.microsoft.com/office/powerpoint/2010/main" val="3719427420"/>
       </p:ext>
     </p:extLst>
   </p:cSld>
@@ -9270,20 +9901,20 @@
 </file>
 
 <file path=customXml/item2.xml><?xml version="1.0" encoding="utf-8"?>
+<p:properties xmlns:p="http://schemas.microsoft.com/office/2006/metadata/properties" xmlns:xsi="http://www.w3.org/2001/XMLSchema-instance" xmlns:pc="http://schemas.microsoft.com/office/infopath/2007/PartnerControls">
+  <documentManagement>
+    <_activity xmlns="6b4d3ab7-1470-4128-9622-ec1cbb31ed76" xsi:nil="true"/>
+  </documentManagement>
+</p:properties>
+</file>
+
+<file path=customXml/item3.xml><?xml version="1.0" encoding="utf-8"?>
 <?mso-contentType ?>
 <FormTemplates xmlns="http://schemas.microsoft.com/sharepoint/v3/contenttype/forms">
   <Display>DocumentLibraryForm</Display>
   <Edit>DocumentLibraryForm</Edit>
   <New>DocumentLibraryForm</New>
 </FormTemplates>
-</file>
-
-<file path=customXml/item3.xml><?xml version="1.0" encoding="utf-8"?>
-<p:properties xmlns:p="http://schemas.microsoft.com/office/2006/metadata/properties" xmlns:xsi="http://www.w3.org/2001/XMLSchema-instance" xmlns:pc="http://schemas.microsoft.com/office/infopath/2007/PartnerControls">
-  <documentManagement>
-    <_activity xmlns="6b4d3ab7-1470-4128-9622-ec1cbb31ed76" xsi:nil="true"/>
-  </documentManagement>
-</p:properties>
 </file>
 
 <file path=customXml/itemProps1.xml><?xml version="1.0" encoding="utf-8"?>
@@ -9306,26 +9937,26 @@
 </file>
 
 <file path=customXml/itemProps2.xml><?xml version="1.0" encoding="utf-8"?>
+<ds:datastoreItem xmlns:ds="http://schemas.openxmlformats.org/officeDocument/2006/customXml" ds:itemID="{FDFB213B-1BC7-44D2-A873-8D8A7D7FD452}">
+  <ds:schemaRefs>
+    <ds:schemaRef ds:uri="http://purl.org/dc/dcmitype/"/>
+    <ds:schemaRef ds:uri="http://schemas.microsoft.com/office/2006/metadata/properties"/>
+    <ds:schemaRef ds:uri="http://schemas.microsoft.com/office/2006/documentManagement/types"/>
+    <ds:schemaRef ds:uri="http://www.w3.org/XML/1998/namespace"/>
+    <ds:schemaRef ds:uri="http://schemas.microsoft.com/office/infopath/2007/PartnerControls"/>
+    <ds:schemaRef ds:uri="http://schemas.openxmlformats.org/package/2006/metadata/core-properties"/>
+    <ds:schemaRef ds:uri="http://purl.org/dc/terms/"/>
+    <ds:schemaRef ds:uri="6e7c07e5-4464-4a81-82bd-bfb2b8f1e56b"/>
+    <ds:schemaRef ds:uri="6b4d3ab7-1470-4128-9622-ec1cbb31ed76"/>
+    <ds:schemaRef ds:uri="http://purl.org/dc/elements/1.1/"/>
+  </ds:schemaRefs>
+</ds:datastoreItem>
+</file>
+
+<file path=customXml/itemProps3.xml><?xml version="1.0" encoding="utf-8"?>
 <ds:datastoreItem xmlns:ds="http://schemas.openxmlformats.org/officeDocument/2006/customXml" ds:itemID="{3987F9D8-BB39-4B50-9844-B26F81374B1E}">
   <ds:schemaRefs>
     <ds:schemaRef ds:uri="http://schemas.microsoft.com/sharepoint/v3/contenttype/forms"/>
   </ds:schemaRefs>
 </ds:datastoreItem>
-</file>
-
-<file path=customXml/itemProps3.xml><?xml version="1.0" encoding="utf-8"?>
-<ds:datastoreItem xmlns:ds="http://schemas.openxmlformats.org/officeDocument/2006/customXml" ds:itemID="{FDFB213B-1BC7-44D2-A873-8D8A7D7FD452}">
-  <ds:schemaRefs>
-    <ds:schemaRef ds:uri="http://schemas.openxmlformats.org/package/2006/metadata/core-properties"/>
-    <ds:schemaRef ds:uri="6b4d3ab7-1470-4128-9622-ec1cbb31ed76"/>
-    <ds:schemaRef ds:uri="http://purl.org/dc/elements/1.1/"/>
-    <ds:schemaRef ds:uri="http://www.w3.org/XML/1998/namespace"/>
-    <ds:schemaRef ds:uri="http://schemas.microsoft.com/office/2006/documentManagement/types"/>
-    <ds:schemaRef ds:uri="6e7c07e5-4464-4a81-82bd-bfb2b8f1e56b"/>
-    <ds:schemaRef ds:uri="http://purl.org/dc/terms/"/>
-    <ds:schemaRef ds:uri="http://schemas.microsoft.com/office/2006/metadata/properties"/>
-    <ds:schemaRef ds:uri="http://schemas.microsoft.com/office/infopath/2007/PartnerControls"/>
-    <ds:schemaRef ds:uri="http://purl.org/dc/dcmitype/"/>
-  </ds:schemaRefs>
-</ds:datastoreItem>
 </file>